--- a/yocto_training_all_session_decks/session_decks/D3S7_License_SBOM.pptx
+++ b/yocto_training_all_session_decks/session_decks/D3S7_License_SBOM.pptx
@@ -5,28 +5,28 @@
     <p:sldMasterId id="2147483648" r:id="rId1"/>
   </p:sldMasterIdLst>
   <p:notesMasterIdLst>
-    <p:notesMasterId r:id="rId8"/>
+    <p:notesMasterId r:id="rId13"/>
   </p:notesMasterIdLst>
   <p:handoutMasterIdLst>
-    <p:handoutMasterId r:id="rId9"/>
+    <p:handoutMasterId r:id="rId14"/>
   </p:handoutMasterIdLst>
   <p:sldIdLst>
-    <p:sldId id="1007" r:id="rId18"/>
-    <p:sldId id="1008" r:id="rId19"/>
-    <p:sldId id="1009" r:id="rId20"/>
-    <p:sldId id="1010" r:id="rId21"/>
-    <p:sldId id="1011" r:id="rId22"/>
-    <p:sldId id="1012" r:id="rId23"/>
-    <p:sldId id="1013" r:id="rId24"/>
-    <p:sldId id="1014" r:id="rId25"/>
-    <p:sldId id="1015" r:id="rId26"/>
-    <p:sldId id="1016" r:id="rId27"/>
-    <p:sldId id="1017" r:id="rId28"/>
+    <p:sldId id="1007" r:id="rId2"/>
+    <p:sldId id="1008" r:id="rId3"/>
+    <p:sldId id="1009" r:id="rId4"/>
+    <p:sldId id="1010" r:id="rId5"/>
+    <p:sldId id="1011" r:id="rId6"/>
+    <p:sldId id="1012" r:id="rId7"/>
+    <p:sldId id="1013" r:id="rId8"/>
+    <p:sldId id="1014" r:id="rId9"/>
+    <p:sldId id="1015" r:id="rId10"/>
+    <p:sldId id="1016" r:id="rId11"/>
+    <p:sldId id="1017" r:id="rId12"/>
   </p:sldIdLst>
   <p:sldSz cx="12192000" cy="6858000"/>
   <p:notesSz cx="6858000" cy="9144000"/>
   <p:custDataLst>
-    <p:tags r:id="rId10"/>
+    <p:tags r:id="rId15"/>
   </p:custDataLst>
   <p:defaultTextStyle>
     <a:defPPr>
@@ -2932,7 +2932,7 @@
           <a:p>
             <a:fld id="{0CEC647C-F50C-4F78-AA33-D7AA6CDA18EE}" type="datetimeFigureOut">
               <a:rPr lang="en-US" smtClean="0"/>
-              <a:t>7/13/2025</a:t>
+              <a:t>6/11/2026</a:t>
             </a:fld>
             <a:endParaRPr lang="en-US"/>
           </a:p>
@@ -3097,7 +3097,7 @@
           <a:p>
             <a:fld id="{3A83341F-E62C-483B-84B4-966F8BE46097}" type="datetimeFigureOut">
               <a:rPr lang="en-US" smtClean="0"/>
-              <a:t>7/13/2025</a:t>
+              <a:t>6/11/2026</a:t>
             </a:fld>
             <a:endParaRPr lang="en-US"/>
           </a:p>
@@ -5181,8 +5181,8 @@
 </p:sldMaster>
 </file>
 
-<file path=ppt/slides/slide10.xml><?xml version="1.0" encoding="utf-8"?>
-<p:sld xmlns:a="http://schemas.openxmlformats.org/drawingml/2006/main" xmlns:p="http://schemas.openxmlformats.org/presentationml/2006/main" xmlns:r="http://schemas.openxmlformats.org/officeDocument/2006/relationships">
+<file path=ppt/slides/slide1.xml><?xml version="1.0" encoding="utf-8"?>
+<p:sld xmlns:a="http://schemas.openxmlformats.org/drawingml/2006/main" xmlns:r="http://schemas.openxmlformats.org/officeDocument/2006/relationships" xmlns:p="http://schemas.openxmlformats.org/presentationml/2006/main">
   <p:cSld>
     <p:spTree>
       <p:nvGrpSpPr>
@@ -5190,7 +5190,93 @@
         <p:cNvGrpSpPr/>
         <p:nvPr/>
       </p:nvGrpSpPr>
-      <p:grpSpPr/>
+      <p:grpSpPr>
+        <a:xfrm>
+          <a:off x="0" y="0"/>
+          <a:ext cx="0" cy="0"/>
+          <a:chOff x="0" y="0"/>
+          <a:chExt cx="0" cy="0"/>
+        </a:xfrm>
+      </p:grpSpPr>
+      <p:sp>
+        <p:nvSpPr>
+          <p:cNvPr id="2" name="Title 1"/>
+          <p:cNvSpPr>
+            <a:spLocks noGrp="1"/>
+          </p:cNvSpPr>
+          <p:nvPr>
+            <p:ph type="ctrTitle"/>
+          </p:nvPr>
+        </p:nvSpPr>
+        <p:spPr/>
+        <p:txBody>
+          <a:bodyPr/>
+          <a:lstStyle/>
+          <a:p>
+            <a:r>
+              <a:rPr sz="4400" b="1">
+                <a:solidFill>
+                  <a:srgbClr val="FFFFFF"/>
+                </a:solidFill>
+                <a:latin typeface="Calibri"/>
+              </a:rPr>
+              <a:t>License Compliance &amp; SBOM</a:t>
+            </a:r>
+          </a:p>
+        </p:txBody>
+      </p:sp>
+      <p:sp>
+        <p:nvSpPr>
+          <p:cNvPr id="3" name="Subtitle 2"/>
+          <p:cNvSpPr>
+            <a:spLocks noGrp="1"/>
+          </p:cNvSpPr>
+          <p:nvPr>
+            <p:ph type="subTitle" idx="1"/>
+          </p:nvPr>
+        </p:nvSpPr>
+        <p:spPr/>
+        <p:txBody>
+          <a:bodyPr/>
+          <a:lstStyle/>
+          <a:p>
+            <a:r>
+              <a:rPr sz="1800" dirty="0">
+                <a:solidFill>
+                  <a:srgbClr val="FFFFFF"/>
+                </a:solidFill>
+                <a:latin typeface="Calibri"/>
+              </a:rPr>
+              <a:t>SPDX, license manifests, audits</a:t>
+            </a:r>
+          </a:p>
+        </p:txBody>
+      </p:sp>
+    </p:spTree>
+  </p:cSld>
+  <p:clrMapOvr>
+    <a:masterClrMapping/>
+  </p:clrMapOvr>
+</p:sld>
+</file>
+
+<file path=ppt/slides/slide10.xml><?xml version="1.0" encoding="utf-8"?>
+<p:sld xmlns:a="http://schemas.openxmlformats.org/drawingml/2006/main" xmlns:r="http://schemas.openxmlformats.org/officeDocument/2006/relationships" xmlns:p="http://schemas.openxmlformats.org/presentationml/2006/main">
+  <p:cSld>
+    <p:spTree>
+      <p:nvGrpSpPr>
+        <p:cNvPr id="1" name=""/>
+        <p:cNvGrpSpPr/>
+        <p:nvPr/>
+      </p:nvGrpSpPr>
+      <p:grpSpPr>
+        <a:xfrm>
+          <a:off x="0" y="0"/>
+          <a:ext cx="0" cy="0"/>
+          <a:chOff x="0" y="0"/>
+          <a:chExt cx="0" cy="0"/>
+        </a:xfrm>
+      </p:grpSpPr>
       <p:sp>
         <p:nvSpPr>
           <p:cNvPr id="2" name="Title 1"/>
@@ -5213,7 +5299,7 @@
                 </a:solidFill>
                 <a:latin typeface="Calibri"/>
               </a:rPr>
-              <a:t>SPDX Identifiers in Recipes</a:t>
+              <a:t>What Auditors Ask For</a:t>
             </a:r>
           </a:p>
         </p:txBody>
@@ -5235,7 +5321,2195 @@
           <a:noFill/>
         </p:spPr>
         <p:txBody>
-          <a:bodyPr wrap="square" anchor="t" lIns="45720" rIns="45720">
+          <a:bodyPr wrap="square" lIns="45720" rIns="45720" anchor="t">
+            <a:spAutoFit/>
+          </a:bodyPr>
+          <a:lstStyle/>
+          <a:p>
+            <a:pPr algn="l"/>
+            <a:r>
+              <a:rPr sz="1500" b="0" i="1">
+                <a:solidFill>
+                  <a:srgbClr val="666666"/>
+                </a:solidFill>
+                <a:latin typeface="Calibri"/>
+              </a:rPr>
+              <a:t>Three documents that close most audits.</a:t>
+            </a:r>
+          </a:p>
+        </p:txBody>
+      </p:sp>
+      <p:sp>
+        <p:nvSpPr>
+          <p:cNvPr id="4" name="Rectangle 3"/>
+          <p:cNvSpPr/>
+          <p:nvPr/>
+        </p:nvSpPr>
+        <p:spPr>
+          <a:xfrm>
+            <a:off x="640080" y="1783080"/>
+            <a:ext cx="3520440" cy="640080"/>
+          </a:xfrm>
+          <a:prstGeom prst="rect">
+            <a:avLst/>
+          </a:prstGeom>
+          <a:solidFill>
+            <a:srgbClr val="CC0066"/>
+          </a:solidFill>
+          <a:ln>
+            <a:noFill/>
+          </a:ln>
+          <a:effectLst/>
+        </p:spPr>
+        <p:style>
+          <a:lnRef idx="1">
+            <a:schemeClr val="accent1"/>
+          </a:lnRef>
+          <a:fillRef idx="3">
+            <a:schemeClr val="accent1"/>
+          </a:fillRef>
+          <a:effectRef idx="2">
+            <a:schemeClr val="accent1"/>
+          </a:effectRef>
+          <a:fontRef idx="minor">
+            <a:schemeClr val="lt1"/>
+          </a:fontRef>
+        </p:style>
+        <p:txBody>
+          <a:bodyPr lIns="182880" rtlCol="0" anchor="ctr"/>
+          <a:lstStyle/>
+          <a:p>
+            <a:pPr algn="ctr"/>
+            <a:r>
+              <a:rPr sz="2000" b="1">
+                <a:solidFill>
+                  <a:srgbClr val="FFFFFF"/>
+                </a:solidFill>
+                <a:latin typeface="Calibri"/>
+              </a:rPr>
+              <a:t>License manifest</a:t>
+            </a:r>
+          </a:p>
+          <a:p>
+            <a:r>
+              <a:rPr sz="1200" i="1">
+                <a:solidFill>
+                  <a:srgbClr val="FFFFFF"/>
+                </a:solidFill>
+                <a:latin typeface="Calibri"/>
+              </a:rPr>
+              <a:t>All software, all licenses</a:t>
+            </a:r>
+          </a:p>
+        </p:txBody>
+      </p:sp>
+      <p:sp>
+        <p:nvSpPr>
+          <p:cNvPr id="5" name="Rectangle 4"/>
+          <p:cNvSpPr/>
+          <p:nvPr/>
+        </p:nvSpPr>
+        <p:spPr>
+          <a:xfrm>
+            <a:off x="640080" y="2423160"/>
+            <a:ext cx="3520440" cy="3657600"/>
+          </a:xfrm>
+          <a:prstGeom prst="rect">
+            <a:avLst/>
+          </a:prstGeom>
+          <a:solidFill>
+            <a:srgbClr val="FAFAFA"/>
+          </a:solidFill>
+          <a:ln w="6350">
+            <a:solidFill>
+              <a:srgbClr val="CC0066"/>
+            </a:solidFill>
+          </a:ln>
+          <a:effectLst/>
+        </p:spPr>
+        <p:style>
+          <a:lnRef idx="1">
+            <a:schemeClr val="accent1"/>
+          </a:lnRef>
+          <a:fillRef idx="3">
+            <a:schemeClr val="accent1"/>
+          </a:fillRef>
+          <a:effectRef idx="2">
+            <a:schemeClr val="accent1"/>
+          </a:effectRef>
+          <a:fontRef idx="minor">
+            <a:schemeClr val="lt1"/>
+          </a:fontRef>
+        </p:style>
+        <p:txBody>
+          <a:bodyPr rtlCol="0" anchor="ctr"/>
+          <a:lstStyle/>
+          <a:p>
+            <a:pPr algn="ctr"/>
+            <a:endParaRPr/>
+          </a:p>
+        </p:txBody>
+      </p:sp>
+      <p:sp>
+        <p:nvSpPr>
+          <p:cNvPr id="6" name="TextBox 5"/>
+          <p:cNvSpPr txBox="1"/>
+          <p:nvPr/>
+        </p:nvSpPr>
+        <p:spPr>
+          <a:xfrm>
+            <a:off x="731519" y="2514600"/>
+            <a:ext cx="3337560" cy="2769989"/>
+          </a:xfrm>
+          <a:prstGeom prst="rect">
+            <a:avLst/>
+          </a:prstGeom>
+          <a:noFill/>
+        </p:spPr>
+        <p:txBody>
+          <a:bodyPr wrap="square" lIns="45720" rIns="45720">
+            <a:spAutoFit/>
+          </a:bodyPr>
+          <a:lstStyle/>
+          <a:p>
+            <a:pPr>
+              <a:spcAft>
+                <a:spcPts val="400"/>
+              </a:spcAft>
+            </a:pPr>
+            <a:r>
+              <a:rPr sz="1600" b="1" i="0">
+                <a:solidFill>
+                  <a:srgbClr val="CC0066"/>
+                </a:solidFill>
+                <a:latin typeface="Calibri"/>
+              </a:rPr>
+              <a:t>What:</a:t>
+            </a:r>
+          </a:p>
+          <a:p>
+            <a:pPr>
+              <a:spcAft>
+                <a:spcPts val="400"/>
+              </a:spcAft>
+            </a:pPr>
+            <a:r>
+              <a:rPr sz="1400" b="0" i="0">
+                <a:solidFill>
+                  <a:srgbClr val="333333"/>
+                </a:solidFill>
+                <a:latin typeface="Calibri"/>
+              </a:rPr>
+              <a:t>Every package, its</a:t>
+            </a:r>
+          </a:p>
+          <a:p>
+            <a:pPr>
+              <a:spcAft>
+                <a:spcPts val="400"/>
+              </a:spcAft>
+            </a:pPr>
+            <a:r>
+              <a:rPr sz="1400" b="0" i="0">
+                <a:solidFill>
+                  <a:srgbClr val="333333"/>
+                </a:solidFill>
+                <a:latin typeface="Calibri"/>
+              </a:rPr>
+              <a:t>version, its license</a:t>
+            </a:r>
+          </a:p>
+          <a:p>
+            <a:pPr>
+              <a:spcAft>
+                <a:spcPts val="400"/>
+              </a:spcAft>
+            </a:pPr>
+            <a:endParaRPr sz="1400" b="0" i="0">
+              <a:solidFill>
+                <a:srgbClr val="333333"/>
+              </a:solidFill>
+              <a:latin typeface="Calibri"/>
+            </a:endParaRPr>
+          </a:p>
+          <a:p>
+            <a:pPr>
+              <a:spcAft>
+                <a:spcPts val="400"/>
+              </a:spcAft>
+            </a:pPr>
+            <a:r>
+              <a:rPr sz="1600" b="1" i="0">
+                <a:solidFill>
+                  <a:srgbClr val="CC0066"/>
+                </a:solidFill>
+                <a:latin typeface="Calibri"/>
+              </a:rPr>
+              <a:t>Yocto provides:</a:t>
+            </a:r>
+          </a:p>
+          <a:p>
+            <a:pPr>
+              <a:spcAft>
+                <a:spcPts val="400"/>
+              </a:spcAft>
+            </a:pPr>
+            <a:r>
+              <a:rPr sz="1400" b="0" i="0">
+                <a:solidFill>
+                  <a:srgbClr val="333333"/>
+                </a:solidFill>
+                <a:latin typeface="Calibri"/>
+              </a:rPr>
+              <a:t>tmp/deploy/licenses/</a:t>
+            </a:r>
+          </a:p>
+          <a:p>
+            <a:pPr>
+              <a:spcAft>
+                <a:spcPts val="400"/>
+              </a:spcAft>
+            </a:pPr>
+            <a:r>
+              <a:rPr sz="1400" b="0" i="0">
+                <a:solidFill>
+                  <a:srgbClr val="333333"/>
+                </a:solidFill>
+                <a:latin typeface="Calibri"/>
+              </a:rPr>
+              <a:t>&lt;image&gt;/license.manifest</a:t>
+            </a:r>
+          </a:p>
+          <a:p>
+            <a:pPr>
+              <a:spcAft>
+                <a:spcPts val="400"/>
+              </a:spcAft>
+            </a:pPr>
+            <a:endParaRPr sz="1400" b="0" i="0">
+              <a:solidFill>
+                <a:srgbClr val="333333"/>
+              </a:solidFill>
+              <a:latin typeface="Calibri"/>
+            </a:endParaRPr>
+          </a:p>
+          <a:p>
+            <a:pPr>
+              <a:spcAft>
+                <a:spcPts val="400"/>
+              </a:spcAft>
+            </a:pPr>
+            <a:r>
+              <a:rPr sz="1400" b="0" i="0">
+                <a:solidFill>
+                  <a:srgbClr val="333333"/>
+                </a:solidFill>
+                <a:latin typeface="Calibri"/>
+              </a:rPr>
+              <a:t>Hand it over</a:t>
+            </a:r>
+          </a:p>
+          <a:p>
+            <a:pPr>
+              <a:spcAft>
+                <a:spcPts val="400"/>
+              </a:spcAft>
+            </a:pPr>
+            <a:r>
+              <a:rPr sz="1400" b="0" i="0">
+                <a:solidFill>
+                  <a:srgbClr val="333333"/>
+                </a:solidFill>
+                <a:latin typeface="Calibri"/>
+              </a:rPr>
+              <a:t>as-is</a:t>
+            </a:r>
+          </a:p>
+        </p:txBody>
+      </p:sp>
+      <p:sp>
+        <p:nvSpPr>
+          <p:cNvPr id="7" name="Rectangle 6"/>
+          <p:cNvSpPr/>
+          <p:nvPr/>
+        </p:nvSpPr>
+        <p:spPr>
+          <a:xfrm>
+            <a:off x="4297680" y="1783080"/>
+            <a:ext cx="3520440" cy="640080"/>
+          </a:xfrm>
+          <a:prstGeom prst="rect">
+            <a:avLst/>
+          </a:prstGeom>
+          <a:solidFill>
+            <a:srgbClr val="663399"/>
+          </a:solidFill>
+          <a:ln>
+            <a:noFill/>
+          </a:ln>
+          <a:effectLst/>
+        </p:spPr>
+        <p:style>
+          <a:lnRef idx="1">
+            <a:schemeClr val="accent1"/>
+          </a:lnRef>
+          <a:fillRef idx="3">
+            <a:schemeClr val="accent1"/>
+          </a:fillRef>
+          <a:effectRef idx="2">
+            <a:schemeClr val="accent1"/>
+          </a:effectRef>
+          <a:fontRef idx="minor">
+            <a:schemeClr val="lt1"/>
+          </a:fontRef>
+        </p:style>
+        <p:txBody>
+          <a:bodyPr lIns="182880" rtlCol="0" anchor="ctr"/>
+          <a:lstStyle/>
+          <a:p>
+            <a:pPr algn="ctr"/>
+            <a:r>
+              <a:rPr sz="2000" b="1">
+                <a:solidFill>
+                  <a:srgbClr val="FFFFFF"/>
+                </a:solidFill>
+                <a:latin typeface="Calibri"/>
+              </a:rPr>
+              <a:t>SBOM (SPDX)</a:t>
+            </a:r>
+          </a:p>
+          <a:p>
+            <a:r>
+              <a:rPr sz="1200" i="1">
+                <a:solidFill>
+                  <a:srgbClr val="FFFFFF"/>
+                </a:solidFill>
+                <a:latin typeface="Calibri"/>
+              </a:rPr>
+              <a:t>Machine-readable BOM</a:t>
+            </a:r>
+          </a:p>
+        </p:txBody>
+      </p:sp>
+      <p:sp>
+        <p:nvSpPr>
+          <p:cNvPr id="8" name="Rectangle 7"/>
+          <p:cNvSpPr/>
+          <p:nvPr/>
+        </p:nvSpPr>
+        <p:spPr>
+          <a:xfrm>
+            <a:off x="4297680" y="2423160"/>
+            <a:ext cx="3520440" cy="3657600"/>
+          </a:xfrm>
+          <a:prstGeom prst="rect">
+            <a:avLst/>
+          </a:prstGeom>
+          <a:solidFill>
+            <a:srgbClr val="FAFAFA"/>
+          </a:solidFill>
+          <a:ln w="6350">
+            <a:solidFill>
+              <a:srgbClr val="663399"/>
+            </a:solidFill>
+          </a:ln>
+          <a:effectLst/>
+        </p:spPr>
+        <p:style>
+          <a:lnRef idx="1">
+            <a:schemeClr val="accent1"/>
+          </a:lnRef>
+          <a:fillRef idx="3">
+            <a:schemeClr val="accent1"/>
+          </a:fillRef>
+          <a:effectRef idx="2">
+            <a:schemeClr val="accent1"/>
+          </a:effectRef>
+          <a:fontRef idx="minor">
+            <a:schemeClr val="lt1"/>
+          </a:fontRef>
+        </p:style>
+        <p:txBody>
+          <a:bodyPr rtlCol="0" anchor="ctr"/>
+          <a:lstStyle/>
+          <a:p>
+            <a:pPr algn="ctr"/>
+            <a:endParaRPr/>
+          </a:p>
+        </p:txBody>
+      </p:sp>
+      <p:sp>
+        <p:nvSpPr>
+          <p:cNvPr id="9" name="TextBox 8"/>
+          <p:cNvSpPr txBox="1"/>
+          <p:nvPr/>
+        </p:nvSpPr>
+        <p:spPr>
+          <a:xfrm>
+            <a:off x="4389120" y="2514600"/>
+            <a:ext cx="3337560" cy="2769989"/>
+          </a:xfrm>
+          <a:prstGeom prst="rect">
+            <a:avLst/>
+          </a:prstGeom>
+          <a:noFill/>
+        </p:spPr>
+        <p:txBody>
+          <a:bodyPr wrap="square" lIns="45720" rIns="45720">
+            <a:spAutoFit/>
+          </a:bodyPr>
+          <a:lstStyle/>
+          <a:p>
+            <a:pPr>
+              <a:spcAft>
+                <a:spcPts val="400"/>
+              </a:spcAft>
+            </a:pPr>
+            <a:r>
+              <a:rPr sz="1600" b="1" i="0">
+                <a:solidFill>
+                  <a:srgbClr val="663399"/>
+                </a:solidFill>
+                <a:latin typeface="Calibri"/>
+              </a:rPr>
+              <a:t>What:</a:t>
+            </a:r>
+          </a:p>
+          <a:p>
+            <a:pPr>
+              <a:spcAft>
+                <a:spcPts val="400"/>
+              </a:spcAft>
+            </a:pPr>
+            <a:r>
+              <a:rPr sz="1400" b="0" i="0">
+                <a:solidFill>
+                  <a:srgbClr val="333333"/>
+                </a:solidFill>
+                <a:latin typeface="Calibri"/>
+              </a:rPr>
+              <a:t>Standardized package list,</a:t>
+            </a:r>
+          </a:p>
+          <a:p>
+            <a:pPr>
+              <a:spcAft>
+                <a:spcPts val="400"/>
+              </a:spcAft>
+            </a:pPr>
+            <a:r>
+              <a:rPr sz="1400" b="0" i="0">
+                <a:solidFill>
+                  <a:srgbClr val="333333"/>
+                </a:solidFill>
+                <a:latin typeface="Calibri"/>
+              </a:rPr>
+              <a:t>supplier, version, hash,</a:t>
+            </a:r>
+          </a:p>
+          <a:p>
+            <a:pPr>
+              <a:spcAft>
+                <a:spcPts val="400"/>
+              </a:spcAft>
+            </a:pPr>
+            <a:r>
+              <a:rPr sz="1400" b="0" i="0">
+                <a:solidFill>
+                  <a:srgbClr val="333333"/>
+                </a:solidFill>
+                <a:latin typeface="Calibri"/>
+              </a:rPr>
+              <a:t>relationships</a:t>
+            </a:r>
+          </a:p>
+          <a:p>
+            <a:pPr>
+              <a:spcAft>
+                <a:spcPts val="400"/>
+              </a:spcAft>
+            </a:pPr>
+            <a:endParaRPr sz="1400" b="0" i="0">
+              <a:solidFill>
+                <a:srgbClr val="333333"/>
+              </a:solidFill>
+              <a:latin typeface="Calibri"/>
+            </a:endParaRPr>
+          </a:p>
+          <a:p>
+            <a:pPr>
+              <a:spcAft>
+                <a:spcPts val="400"/>
+              </a:spcAft>
+            </a:pPr>
+            <a:r>
+              <a:rPr sz="1600" b="1" i="0">
+                <a:solidFill>
+                  <a:srgbClr val="663399"/>
+                </a:solidFill>
+                <a:latin typeface="Calibri"/>
+              </a:rPr>
+              <a:t>Yocto provides:</a:t>
+            </a:r>
+          </a:p>
+          <a:p>
+            <a:pPr>
+              <a:spcAft>
+                <a:spcPts val="400"/>
+              </a:spcAft>
+            </a:pPr>
+            <a:r>
+              <a:rPr sz="1400" b="0" i="0">
+                <a:solidFill>
+                  <a:srgbClr val="333333"/>
+                </a:solidFill>
+                <a:latin typeface="Calibri"/>
+              </a:rPr>
+              <a:t>tmp/deploy/spdx/</a:t>
+            </a:r>
+          </a:p>
+          <a:p>
+            <a:pPr>
+              <a:spcAft>
+                <a:spcPts val="400"/>
+              </a:spcAft>
+            </a:pPr>
+            <a:r>
+              <a:rPr sz="1400" b="0" i="0">
+                <a:solidFill>
+                  <a:srgbClr val="333333"/>
+                </a:solidFill>
+                <a:latin typeface="Calibri"/>
+              </a:rPr>
+              <a:t>(after INHERIT += create-spdx)</a:t>
+            </a:r>
+          </a:p>
+          <a:p>
+            <a:pPr>
+              <a:spcAft>
+                <a:spcPts val="400"/>
+              </a:spcAft>
+            </a:pPr>
+            <a:endParaRPr sz="1400" b="0" i="0">
+              <a:solidFill>
+                <a:srgbClr val="333333"/>
+              </a:solidFill>
+              <a:latin typeface="Calibri"/>
+            </a:endParaRPr>
+          </a:p>
+          <a:p>
+            <a:pPr>
+              <a:spcAft>
+                <a:spcPts val="400"/>
+              </a:spcAft>
+            </a:pPr>
+            <a:r>
+              <a:rPr sz="1400" b="0" i="0">
+                <a:solidFill>
+                  <a:srgbClr val="333333"/>
+                </a:solidFill>
+                <a:latin typeface="Calibri"/>
+              </a:rPr>
+              <a:t>Feeds into scanners</a:t>
+            </a:r>
+          </a:p>
+        </p:txBody>
+      </p:sp>
+      <p:sp>
+        <p:nvSpPr>
+          <p:cNvPr id="10" name="Rectangle 9"/>
+          <p:cNvSpPr/>
+          <p:nvPr/>
+        </p:nvSpPr>
+        <p:spPr>
+          <a:xfrm>
+            <a:off x="7955279" y="1783080"/>
+            <a:ext cx="3520440" cy="640080"/>
+          </a:xfrm>
+          <a:prstGeom prst="rect">
+            <a:avLst/>
+          </a:prstGeom>
+          <a:solidFill>
+            <a:srgbClr val="CC0066"/>
+          </a:solidFill>
+          <a:ln>
+            <a:noFill/>
+          </a:ln>
+          <a:effectLst/>
+        </p:spPr>
+        <p:style>
+          <a:lnRef idx="1">
+            <a:schemeClr val="accent1"/>
+          </a:lnRef>
+          <a:fillRef idx="3">
+            <a:schemeClr val="accent1"/>
+          </a:fillRef>
+          <a:effectRef idx="2">
+            <a:schemeClr val="accent1"/>
+          </a:effectRef>
+          <a:fontRef idx="minor">
+            <a:schemeClr val="lt1"/>
+          </a:fontRef>
+        </p:style>
+        <p:txBody>
+          <a:bodyPr lIns="182880" rtlCol="0" anchor="ctr"/>
+          <a:lstStyle/>
+          <a:p>
+            <a:pPr algn="ctr"/>
+            <a:r>
+              <a:rPr sz="2000" b="1">
+                <a:solidFill>
+                  <a:srgbClr val="FFFFFF"/>
+                </a:solidFill>
+                <a:latin typeface="Calibri"/>
+              </a:rPr>
+              <a:t>CVE report</a:t>
+            </a:r>
+          </a:p>
+          <a:p>
+            <a:r>
+              <a:rPr sz="1200" i="1">
+                <a:solidFill>
+                  <a:srgbClr val="FFFFFF"/>
+                </a:solidFill>
+                <a:latin typeface="Calibri"/>
+              </a:rPr>
+              <a:t>What's vulnerable now</a:t>
+            </a:r>
+          </a:p>
+        </p:txBody>
+      </p:sp>
+      <p:sp>
+        <p:nvSpPr>
+          <p:cNvPr id="11" name="Rectangle 10"/>
+          <p:cNvSpPr/>
+          <p:nvPr/>
+        </p:nvSpPr>
+        <p:spPr>
+          <a:xfrm>
+            <a:off x="7955279" y="2423160"/>
+            <a:ext cx="3520440" cy="3657600"/>
+          </a:xfrm>
+          <a:prstGeom prst="rect">
+            <a:avLst/>
+          </a:prstGeom>
+          <a:solidFill>
+            <a:srgbClr val="FAFAFA"/>
+          </a:solidFill>
+          <a:ln w="6350">
+            <a:solidFill>
+              <a:srgbClr val="CC0066"/>
+            </a:solidFill>
+          </a:ln>
+          <a:effectLst/>
+        </p:spPr>
+        <p:style>
+          <a:lnRef idx="1">
+            <a:schemeClr val="accent1"/>
+          </a:lnRef>
+          <a:fillRef idx="3">
+            <a:schemeClr val="accent1"/>
+          </a:fillRef>
+          <a:effectRef idx="2">
+            <a:schemeClr val="accent1"/>
+          </a:effectRef>
+          <a:fontRef idx="minor">
+            <a:schemeClr val="lt1"/>
+          </a:fontRef>
+        </p:style>
+        <p:txBody>
+          <a:bodyPr rtlCol="0" anchor="ctr"/>
+          <a:lstStyle/>
+          <a:p>
+            <a:pPr algn="ctr"/>
+            <a:endParaRPr/>
+          </a:p>
+        </p:txBody>
+      </p:sp>
+      <p:sp>
+        <p:nvSpPr>
+          <p:cNvPr id="12" name="TextBox 11"/>
+          <p:cNvSpPr txBox="1"/>
+          <p:nvPr/>
+        </p:nvSpPr>
+        <p:spPr>
+          <a:xfrm>
+            <a:off x="8046719" y="2514600"/>
+            <a:ext cx="3337560" cy="2769989"/>
+          </a:xfrm>
+          <a:prstGeom prst="rect">
+            <a:avLst/>
+          </a:prstGeom>
+          <a:noFill/>
+        </p:spPr>
+        <p:txBody>
+          <a:bodyPr wrap="square" lIns="45720" rIns="45720">
+            <a:spAutoFit/>
+          </a:bodyPr>
+          <a:lstStyle/>
+          <a:p>
+            <a:pPr>
+              <a:spcAft>
+                <a:spcPts val="400"/>
+              </a:spcAft>
+            </a:pPr>
+            <a:r>
+              <a:rPr sz="1600" b="1" i="0">
+                <a:solidFill>
+                  <a:srgbClr val="CC0066"/>
+                </a:solidFill>
+                <a:latin typeface="Calibri"/>
+              </a:rPr>
+              <a:t>What:</a:t>
+            </a:r>
+          </a:p>
+          <a:p>
+            <a:pPr>
+              <a:spcAft>
+                <a:spcPts val="400"/>
+              </a:spcAft>
+            </a:pPr>
+            <a:r>
+              <a:rPr sz="1400" b="0" i="0">
+                <a:solidFill>
+                  <a:srgbClr val="333333"/>
+                </a:solidFill>
+                <a:latin typeface="Calibri"/>
+              </a:rPr>
+              <a:t>Per-package CVE list,</a:t>
+            </a:r>
+          </a:p>
+          <a:p>
+            <a:pPr>
+              <a:spcAft>
+                <a:spcPts val="400"/>
+              </a:spcAft>
+            </a:pPr>
+            <a:r>
+              <a:rPr sz="1400" b="0" i="0">
+                <a:solidFill>
+                  <a:srgbClr val="333333"/>
+                </a:solidFill>
+                <a:latin typeface="Calibri"/>
+              </a:rPr>
+              <a:t>patched/unpatched,</a:t>
+            </a:r>
+          </a:p>
+          <a:p>
+            <a:pPr>
+              <a:spcAft>
+                <a:spcPts val="400"/>
+              </a:spcAft>
+            </a:pPr>
+            <a:r>
+              <a:rPr sz="1400" b="0" i="0">
+                <a:solidFill>
+                  <a:srgbClr val="333333"/>
+                </a:solidFill>
+                <a:latin typeface="Calibri"/>
+              </a:rPr>
+              <a:t>justifications</a:t>
+            </a:r>
+          </a:p>
+          <a:p>
+            <a:pPr>
+              <a:spcAft>
+                <a:spcPts val="400"/>
+              </a:spcAft>
+            </a:pPr>
+            <a:endParaRPr sz="1400" b="0" i="0">
+              <a:solidFill>
+                <a:srgbClr val="333333"/>
+              </a:solidFill>
+              <a:latin typeface="Calibri"/>
+            </a:endParaRPr>
+          </a:p>
+          <a:p>
+            <a:pPr>
+              <a:spcAft>
+                <a:spcPts val="400"/>
+              </a:spcAft>
+            </a:pPr>
+            <a:r>
+              <a:rPr sz="1600" b="1" i="0">
+                <a:solidFill>
+                  <a:srgbClr val="CC0066"/>
+                </a:solidFill>
+                <a:latin typeface="Calibri"/>
+              </a:rPr>
+              <a:t>Yocto provides:</a:t>
+            </a:r>
+          </a:p>
+          <a:p>
+            <a:pPr>
+              <a:spcAft>
+                <a:spcPts val="400"/>
+              </a:spcAft>
+            </a:pPr>
+            <a:r>
+              <a:rPr sz="1400" b="0" i="0">
+                <a:solidFill>
+                  <a:srgbClr val="333333"/>
+                </a:solidFill>
+                <a:latin typeface="Calibri"/>
+              </a:rPr>
+              <a:t>tmp/deploy/cve/</a:t>
+            </a:r>
+          </a:p>
+          <a:p>
+            <a:pPr>
+              <a:spcAft>
+                <a:spcPts val="400"/>
+              </a:spcAft>
+            </a:pPr>
+            <a:r>
+              <a:rPr sz="1400" b="0" i="0">
+                <a:solidFill>
+                  <a:srgbClr val="333333"/>
+                </a:solidFill>
+                <a:latin typeface="Calibri"/>
+              </a:rPr>
+              <a:t>(after INHERIT += cve-check)</a:t>
+            </a:r>
+          </a:p>
+          <a:p>
+            <a:pPr>
+              <a:spcAft>
+                <a:spcPts val="400"/>
+              </a:spcAft>
+            </a:pPr>
+            <a:endParaRPr sz="1400" b="0" i="0">
+              <a:solidFill>
+                <a:srgbClr val="333333"/>
+              </a:solidFill>
+              <a:latin typeface="Calibri"/>
+            </a:endParaRPr>
+          </a:p>
+          <a:p>
+            <a:pPr>
+              <a:spcAft>
+                <a:spcPts val="400"/>
+              </a:spcAft>
+            </a:pPr>
+            <a:r>
+              <a:rPr sz="1400" b="0" i="0">
+                <a:solidFill>
+                  <a:srgbClr val="333333"/>
+                </a:solidFill>
+                <a:latin typeface="Calibri"/>
+              </a:rPr>
+              <a:t>Next session covers this</a:t>
+            </a:r>
+          </a:p>
+        </p:txBody>
+      </p:sp>
+    </p:spTree>
+  </p:cSld>
+  <p:clrMapOvr>
+    <a:masterClrMapping/>
+  </p:clrMapOvr>
+</p:sld>
+</file>
+
+<file path=ppt/slides/slide11.xml><?xml version="1.0" encoding="utf-8"?>
+<p:sld xmlns:a="http://schemas.openxmlformats.org/drawingml/2006/main" xmlns:r="http://schemas.openxmlformats.org/officeDocument/2006/relationships" xmlns:p="http://schemas.openxmlformats.org/presentationml/2006/main">
+  <p:cSld>
+    <p:spTree>
+      <p:nvGrpSpPr>
+        <p:cNvPr id="1" name=""/>
+        <p:cNvGrpSpPr/>
+        <p:nvPr/>
+      </p:nvGrpSpPr>
+      <p:grpSpPr>
+        <a:xfrm>
+          <a:off x="0" y="0"/>
+          <a:ext cx="0" cy="0"/>
+          <a:chOff x="0" y="0"/>
+          <a:chExt cx="0" cy="0"/>
+        </a:xfrm>
+      </p:grpSpPr>
+      <p:sp>
+        <p:nvSpPr>
+          <p:cNvPr id="2" name="Title 1"/>
+          <p:cNvSpPr>
+            <a:spLocks noGrp="1"/>
+          </p:cNvSpPr>
+          <p:nvPr>
+            <p:ph type="title"/>
+          </p:nvPr>
+        </p:nvSpPr>
+        <p:spPr/>
+        <p:txBody>
+          <a:bodyPr/>
+          <a:lstStyle/>
+          <a:p>
+            <a:r>
+              <a:rPr sz="3200" b="1">
+                <a:solidFill>
+                  <a:srgbClr val="663399"/>
+                </a:solidFill>
+                <a:latin typeface="Calibri"/>
+              </a:rPr>
+              <a:t>Session Summary</a:t>
+            </a:r>
+          </a:p>
+        </p:txBody>
+      </p:sp>
+      <p:sp>
+        <p:nvSpPr>
+          <p:cNvPr id="3" name="TextBox 2"/>
+          <p:cNvSpPr txBox="1"/>
+          <p:nvPr/>
+        </p:nvSpPr>
+        <p:spPr>
+          <a:xfrm>
+            <a:off x="822960" y="1417320"/>
+            <a:ext cx="10515600" cy="365760"/>
+          </a:xfrm>
+          <a:prstGeom prst="rect">
+            <a:avLst/>
+          </a:prstGeom>
+          <a:noFill/>
+        </p:spPr>
+        <p:txBody>
+          <a:bodyPr wrap="square" lIns="45720" rIns="45720" anchor="t">
+            <a:spAutoFit/>
+          </a:bodyPr>
+          <a:lstStyle/>
+          <a:p>
+            <a:pPr algn="l"/>
+            <a:r>
+              <a:rPr sz="1500" b="0" i="1">
+                <a:solidFill>
+                  <a:srgbClr val="666666"/>
+                </a:solidFill>
+                <a:latin typeface="Calibri"/>
+              </a:rPr>
+              <a:t>5 things to remember from this session.</a:t>
+            </a:r>
+          </a:p>
+        </p:txBody>
+      </p:sp>
+      <p:sp>
+        <p:nvSpPr>
+          <p:cNvPr id="4" name="Rounded Rectangle 3"/>
+          <p:cNvSpPr/>
+          <p:nvPr/>
+        </p:nvSpPr>
+        <p:spPr>
+          <a:xfrm>
+            <a:off x="822960" y="1874519"/>
+            <a:ext cx="457200" cy="548640"/>
+          </a:xfrm>
+          <a:prstGeom prst="roundRect">
+            <a:avLst/>
+          </a:prstGeom>
+          <a:solidFill>
+            <a:srgbClr val="CC0066"/>
+          </a:solidFill>
+          <a:ln>
+            <a:noFill/>
+          </a:ln>
+          <a:effectLst/>
+        </p:spPr>
+        <p:style>
+          <a:lnRef idx="1">
+            <a:schemeClr val="accent1"/>
+          </a:lnRef>
+          <a:fillRef idx="3">
+            <a:schemeClr val="accent1"/>
+          </a:fillRef>
+          <a:effectRef idx="2">
+            <a:schemeClr val="accent1"/>
+          </a:effectRef>
+          <a:fontRef idx="minor">
+            <a:schemeClr val="lt1"/>
+          </a:fontRef>
+        </p:style>
+        <p:txBody>
+          <a:bodyPr lIns="0" rIns="0" rtlCol="0" anchor="ctr"/>
+          <a:lstStyle/>
+          <a:p>
+            <a:pPr algn="ctr"/>
+            <a:r>
+              <a:rPr sz="2200" b="1">
+                <a:solidFill>
+                  <a:srgbClr val="FFFFFF"/>
+                </a:solidFill>
+                <a:latin typeface="Calibri"/>
+              </a:rPr>
+              <a:t>1</a:t>
+            </a:r>
+          </a:p>
+        </p:txBody>
+      </p:sp>
+      <p:sp>
+        <p:nvSpPr>
+          <p:cNvPr id="5" name="TextBox 4"/>
+          <p:cNvSpPr txBox="1"/>
+          <p:nvPr/>
+        </p:nvSpPr>
+        <p:spPr>
+          <a:xfrm>
+            <a:off x="1417320" y="1874519"/>
+            <a:ext cx="10058400" cy="320040"/>
+          </a:xfrm>
+          <a:prstGeom prst="rect">
+            <a:avLst/>
+          </a:prstGeom>
+          <a:noFill/>
+        </p:spPr>
+        <p:txBody>
+          <a:bodyPr wrap="square" lIns="45720" rIns="45720" anchor="t">
+            <a:spAutoFit/>
+          </a:bodyPr>
+          <a:lstStyle/>
+          <a:p>
+            <a:pPr algn="l"/>
+            <a:r>
+              <a:rPr sz="1600" b="1" i="0">
+                <a:solidFill>
+                  <a:srgbClr val="663399"/>
+                </a:solidFill>
+                <a:latin typeface="Calibri"/>
+              </a:rPr>
+              <a:t>Use SPDX identifiers in LICENSE</a:t>
+            </a:r>
+          </a:p>
+        </p:txBody>
+      </p:sp>
+      <p:sp>
+        <p:nvSpPr>
+          <p:cNvPr id="6" name="TextBox 5"/>
+          <p:cNvSpPr txBox="1"/>
+          <p:nvPr/>
+        </p:nvSpPr>
+        <p:spPr>
+          <a:xfrm>
+            <a:off x="1417320" y="2185415"/>
+            <a:ext cx="10058400" cy="320040"/>
+          </a:xfrm>
+          <a:prstGeom prst="rect">
+            <a:avLst/>
+          </a:prstGeom>
+          <a:noFill/>
+        </p:spPr>
+        <p:txBody>
+          <a:bodyPr wrap="square" lIns="45720" rIns="45720" anchor="t">
+            <a:spAutoFit/>
+          </a:bodyPr>
+          <a:lstStyle/>
+          <a:p>
+            <a:pPr algn="l"/>
+            <a:r>
+              <a:rPr sz="1300" b="0" i="0">
+                <a:solidFill>
+                  <a:srgbClr val="333333"/>
+                </a:solidFill>
+                <a:latin typeface="Calibri"/>
+              </a:rPr>
+              <a:t>Free-text 'GPL' is ambiguous; GPL-2.0-only is precise</a:t>
+            </a:r>
+          </a:p>
+        </p:txBody>
+      </p:sp>
+      <p:sp>
+        <p:nvSpPr>
+          <p:cNvPr id="7" name="Rounded Rectangle 6"/>
+          <p:cNvSpPr/>
+          <p:nvPr/>
+        </p:nvSpPr>
+        <p:spPr>
+          <a:xfrm>
+            <a:off x="822960" y="2587752"/>
+            <a:ext cx="457200" cy="548640"/>
+          </a:xfrm>
+          <a:prstGeom prst="roundRect">
+            <a:avLst/>
+          </a:prstGeom>
+          <a:solidFill>
+            <a:srgbClr val="CC0066"/>
+          </a:solidFill>
+          <a:ln>
+            <a:noFill/>
+          </a:ln>
+          <a:effectLst/>
+        </p:spPr>
+        <p:style>
+          <a:lnRef idx="1">
+            <a:schemeClr val="accent1"/>
+          </a:lnRef>
+          <a:fillRef idx="3">
+            <a:schemeClr val="accent1"/>
+          </a:fillRef>
+          <a:effectRef idx="2">
+            <a:schemeClr val="accent1"/>
+          </a:effectRef>
+          <a:fontRef idx="minor">
+            <a:schemeClr val="lt1"/>
+          </a:fontRef>
+        </p:style>
+        <p:txBody>
+          <a:bodyPr lIns="0" rIns="0" rtlCol="0" anchor="ctr"/>
+          <a:lstStyle/>
+          <a:p>
+            <a:pPr algn="ctr"/>
+            <a:r>
+              <a:rPr sz="2200" b="1">
+                <a:solidFill>
+                  <a:srgbClr val="FFFFFF"/>
+                </a:solidFill>
+                <a:latin typeface="Calibri"/>
+              </a:rPr>
+              <a:t>2</a:t>
+            </a:r>
+          </a:p>
+        </p:txBody>
+      </p:sp>
+      <p:sp>
+        <p:nvSpPr>
+          <p:cNvPr id="8" name="TextBox 7"/>
+          <p:cNvSpPr txBox="1"/>
+          <p:nvPr/>
+        </p:nvSpPr>
+        <p:spPr>
+          <a:xfrm>
+            <a:off x="1417320" y="2587752"/>
+            <a:ext cx="10058400" cy="320040"/>
+          </a:xfrm>
+          <a:prstGeom prst="rect">
+            <a:avLst/>
+          </a:prstGeom>
+          <a:noFill/>
+        </p:spPr>
+        <p:txBody>
+          <a:bodyPr wrap="square" lIns="45720" rIns="45720" anchor="t">
+            <a:spAutoFit/>
+          </a:bodyPr>
+          <a:lstStyle/>
+          <a:p>
+            <a:pPr algn="l"/>
+            <a:r>
+              <a:rPr sz="1600" b="1" i="0">
+                <a:solidFill>
+                  <a:srgbClr val="663399"/>
+                </a:solidFill>
+                <a:latin typeface="Calibri"/>
+              </a:rPr>
+              <a:t>LIC_FILES_CHKSUM catches upstream license changes</a:t>
+            </a:r>
+          </a:p>
+        </p:txBody>
+      </p:sp>
+      <p:sp>
+        <p:nvSpPr>
+          <p:cNvPr id="9" name="TextBox 8"/>
+          <p:cNvSpPr txBox="1"/>
+          <p:nvPr/>
+        </p:nvSpPr>
+        <p:spPr>
+          <a:xfrm>
+            <a:off x="1417320" y="2898648"/>
+            <a:ext cx="10058400" cy="320040"/>
+          </a:xfrm>
+          <a:prstGeom prst="rect">
+            <a:avLst/>
+          </a:prstGeom>
+          <a:noFill/>
+        </p:spPr>
+        <p:txBody>
+          <a:bodyPr wrap="square" lIns="45720" rIns="45720" anchor="t">
+            <a:spAutoFit/>
+          </a:bodyPr>
+          <a:lstStyle/>
+          <a:p>
+            <a:pPr algn="l"/>
+            <a:r>
+              <a:rPr sz="1300" b="0" i="0">
+                <a:solidFill>
+                  <a:srgbClr val="333333"/>
+                </a:solidFill>
+                <a:latin typeface="Calibri"/>
+              </a:rPr>
+              <a:t>Tamper-evident; required for every recipe</a:t>
+            </a:r>
+          </a:p>
+        </p:txBody>
+      </p:sp>
+      <p:sp>
+        <p:nvSpPr>
+          <p:cNvPr id="10" name="Rounded Rectangle 9"/>
+          <p:cNvSpPr/>
+          <p:nvPr/>
+        </p:nvSpPr>
+        <p:spPr>
+          <a:xfrm>
+            <a:off x="822960" y="3300984"/>
+            <a:ext cx="457200" cy="548640"/>
+          </a:xfrm>
+          <a:prstGeom prst="roundRect">
+            <a:avLst/>
+          </a:prstGeom>
+          <a:solidFill>
+            <a:srgbClr val="CC0066"/>
+          </a:solidFill>
+          <a:ln>
+            <a:noFill/>
+          </a:ln>
+          <a:effectLst/>
+        </p:spPr>
+        <p:style>
+          <a:lnRef idx="1">
+            <a:schemeClr val="accent1"/>
+          </a:lnRef>
+          <a:fillRef idx="3">
+            <a:schemeClr val="accent1"/>
+          </a:fillRef>
+          <a:effectRef idx="2">
+            <a:schemeClr val="accent1"/>
+          </a:effectRef>
+          <a:fontRef idx="minor">
+            <a:schemeClr val="lt1"/>
+          </a:fontRef>
+        </p:style>
+        <p:txBody>
+          <a:bodyPr lIns="0" rIns="0" rtlCol="0" anchor="ctr"/>
+          <a:lstStyle/>
+          <a:p>
+            <a:pPr algn="ctr"/>
+            <a:r>
+              <a:rPr sz="2200" b="1">
+                <a:solidFill>
+                  <a:srgbClr val="FFFFFF"/>
+                </a:solidFill>
+                <a:latin typeface="Calibri"/>
+              </a:rPr>
+              <a:t>3</a:t>
+            </a:r>
+          </a:p>
+        </p:txBody>
+      </p:sp>
+      <p:sp>
+        <p:nvSpPr>
+          <p:cNvPr id="11" name="TextBox 10"/>
+          <p:cNvSpPr txBox="1"/>
+          <p:nvPr/>
+        </p:nvSpPr>
+        <p:spPr>
+          <a:xfrm>
+            <a:off x="1417320" y="3300984"/>
+            <a:ext cx="10058400" cy="320040"/>
+          </a:xfrm>
+          <a:prstGeom prst="rect">
+            <a:avLst/>
+          </a:prstGeom>
+          <a:noFill/>
+        </p:spPr>
+        <p:txBody>
+          <a:bodyPr wrap="square" lIns="45720" rIns="45720" anchor="t">
+            <a:spAutoFit/>
+          </a:bodyPr>
+          <a:lstStyle/>
+          <a:p>
+            <a:pPr algn="l"/>
+            <a:r>
+              <a:rPr sz="1600" b="1" i="0">
+                <a:solidFill>
+                  <a:srgbClr val="663399"/>
+                </a:solidFill>
+                <a:latin typeface="Calibri"/>
+              </a:rPr>
+              <a:t>INCOMPATIBLE_LICENSE enforces policy</a:t>
+            </a:r>
+          </a:p>
+        </p:txBody>
+      </p:sp>
+      <p:sp>
+        <p:nvSpPr>
+          <p:cNvPr id="12" name="TextBox 11"/>
+          <p:cNvSpPr txBox="1"/>
+          <p:nvPr/>
+        </p:nvSpPr>
+        <p:spPr>
+          <a:xfrm>
+            <a:off x="1417320" y="3611879"/>
+            <a:ext cx="10058400" cy="320040"/>
+          </a:xfrm>
+          <a:prstGeom prst="rect">
+            <a:avLst/>
+          </a:prstGeom>
+          <a:noFill/>
+        </p:spPr>
+        <p:txBody>
+          <a:bodyPr wrap="square" lIns="45720" rIns="45720" anchor="t">
+            <a:spAutoFit/>
+          </a:bodyPr>
+          <a:lstStyle/>
+          <a:p>
+            <a:pPr algn="l"/>
+            <a:r>
+              <a:rPr sz="1300" b="0" i="0">
+                <a:solidFill>
+                  <a:srgbClr val="333333"/>
+                </a:solidFill>
+                <a:latin typeface="Calibri"/>
+              </a:rPr>
+              <a:t>Most embedded products exclude GPL-3 due to anti-Tivoization</a:t>
+            </a:r>
+          </a:p>
+        </p:txBody>
+      </p:sp>
+      <p:sp>
+        <p:nvSpPr>
+          <p:cNvPr id="13" name="Rounded Rectangle 12"/>
+          <p:cNvSpPr/>
+          <p:nvPr/>
+        </p:nvSpPr>
+        <p:spPr>
+          <a:xfrm>
+            <a:off x="822960" y="4014215"/>
+            <a:ext cx="457200" cy="548640"/>
+          </a:xfrm>
+          <a:prstGeom prst="roundRect">
+            <a:avLst/>
+          </a:prstGeom>
+          <a:solidFill>
+            <a:srgbClr val="CC0066"/>
+          </a:solidFill>
+          <a:ln>
+            <a:noFill/>
+          </a:ln>
+          <a:effectLst/>
+        </p:spPr>
+        <p:style>
+          <a:lnRef idx="1">
+            <a:schemeClr val="accent1"/>
+          </a:lnRef>
+          <a:fillRef idx="3">
+            <a:schemeClr val="accent1"/>
+          </a:fillRef>
+          <a:effectRef idx="2">
+            <a:schemeClr val="accent1"/>
+          </a:effectRef>
+          <a:fontRef idx="minor">
+            <a:schemeClr val="lt1"/>
+          </a:fontRef>
+        </p:style>
+        <p:txBody>
+          <a:bodyPr lIns="0" rIns="0" rtlCol="0" anchor="ctr"/>
+          <a:lstStyle/>
+          <a:p>
+            <a:pPr algn="ctr"/>
+            <a:r>
+              <a:rPr sz="2200" b="1">
+                <a:solidFill>
+                  <a:srgbClr val="FFFFFF"/>
+                </a:solidFill>
+                <a:latin typeface="Calibri"/>
+              </a:rPr>
+              <a:t>4</a:t>
+            </a:r>
+          </a:p>
+        </p:txBody>
+      </p:sp>
+      <p:sp>
+        <p:nvSpPr>
+          <p:cNvPr id="14" name="TextBox 13"/>
+          <p:cNvSpPr txBox="1"/>
+          <p:nvPr/>
+        </p:nvSpPr>
+        <p:spPr>
+          <a:xfrm>
+            <a:off x="1417320" y="4014215"/>
+            <a:ext cx="10058400" cy="320040"/>
+          </a:xfrm>
+          <a:prstGeom prst="rect">
+            <a:avLst/>
+          </a:prstGeom>
+          <a:noFill/>
+        </p:spPr>
+        <p:txBody>
+          <a:bodyPr wrap="square" lIns="45720" rIns="45720" anchor="t">
+            <a:spAutoFit/>
+          </a:bodyPr>
+          <a:lstStyle/>
+          <a:p>
+            <a:pPr algn="l"/>
+            <a:r>
+              <a:rPr sz="1600" b="1" i="0">
+                <a:solidFill>
+                  <a:srgbClr val="663399"/>
+                </a:solidFill>
+                <a:latin typeface="Calibri"/>
+              </a:rPr>
+              <a:t>License manifests are auto-generated</a:t>
+            </a:r>
+          </a:p>
+        </p:txBody>
+      </p:sp>
+      <p:sp>
+        <p:nvSpPr>
+          <p:cNvPr id="15" name="TextBox 14"/>
+          <p:cNvSpPr txBox="1"/>
+          <p:nvPr/>
+        </p:nvSpPr>
+        <p:spPr>
+          <a:xfrm>
+            <a:off x="1417320" y="4325112"/>
+            <a:ext cx="10058400" cy="320040"/>
+          </a:xfrm>
+          <a:prstGeom prst="rect">
+            <a:avLst/>
+          </a:prstGeom>
+          <a:noFill/>
+        </p:spPr>
+        <p:txBody>
+          <a:bodyPr wrap="square" lIns="45720" rIns="45720" anchor="t">
+            <a:spAutoFit/>
+          </a:bodyPr>
+          <a:lstStyle/>
+          <a:p>
+            <a:pPr algn="l"/>
+            <a:r>
+              <a:rPr sz="1300" b="0" i="0">
+                <a:solidFill>
+                  <a:srgbClr val="333333"/>
+                </a:solidFill>
+                <a:latin typeface="Calibri"/>
+              </a:rPr>
+              <a:t>tmp/deploy/licenses/ — ship to auditors as-is</a:t>
+            </a:r>
+          </a:p>
+        </p:txBody>
+      </p:sp>
+      <p:sp>
+        <p:nvSpPr>
+          <p:cNvPr id="16" name="Rounded Rectangle 15"/>
+          <p:cNvSpPr/>
+          <p:nvPr/>
+        </p:nvSpPr>
+        <p:spPr>
+          <a:xfrm>
+            <a:off x="822960" y="4727448"/>
+            <a:ext cx="457200" cy="548640"/>
+          </a:xfrm>
+          <a:prstGeom prst="roundRect">
+            <a:avLst/>
+          </a:prstGeom>
+          <a:solidFill>
+            <a:srgbClr val="CC0066"/>
+          </a:solidFill>
+          <a:ln>
+            <a:noFill/>
+          </a:ln>
+          <a:effectLst/>
+        </p:spPr>
+        <p:style>
+          <a:lnRef idx="1">
+            <a:schemeClr val="accent1"/>
+          </a:lnRef>
+          <a:fillRef idx="3">
+            <a:schemeClr val="accent1"/>
+          </a:fillRef>
+          <a:effectRef idx="2">
+            <a:schemeClr val="accent1"/>
+          </a:effectRef>
+          <a:fontRef idx="minor">
+            <a:schemeClr val="lt1"/>
+          </a:fontRef>
+        </p:style>
+        <p:txBody>
+          <a:bodyPr lIns="0" rIns="0" rtlCol="0" anchor="ctr"/>
+          <a:lstStyle/>
+          <a:p>
+            <a:pPr algn="ctr"/>
+            <a:r>
+              <a:rPr sz="2200" b="1">
+                <a:solidFill>
+                  <a:srgbClr val="FFFFFF"/>
+                </a:solidFill>
+                <a:latin typeface="Calibri"/>
+              </a:rPr>
+              <a:t>5</a:t>
+            </a:r>
+          </a:p>
+        </p:txBody>
+      </p:sp>
+      <p:sp>
+        <p:nvSpPr>
+          <p:cNvPr id="17" name="TextBox 16"/>
+          <p:cNvSpPr txBox="1"/>
+          <p:nvPr/>
+        </p:nvSpPr>
+        <p:spPr>
+          <a:xfrm>
+            <a:off x="1417320" y="4727448"/>
+            <a:ext cx="10058400" cy="320040"/>
+          </a:xfrm>
+          <a:prstGeom prst="rect">
+            <a:avLst/>
+          </a:prstGeom>
+          <a:noFill/>
+        </p:spPr>
+        <p:txBody>
+          <a:bodyPr wrap="square" lIns="45720" rIns="45720" anchor="t">
+            <a:spAutoFit/>
+          </a:bodyPr>
+          <a:lstStyle/>
+          <a:p>
+            <a:pPr algn="l"/>
+            <a:r>
+              <a:rPr sz="1600" b="1" i="0">
+                <a:solidFill>
+                  <a:srgbClr val="663399"/>
+                </a:solidFill>
+                <a:latin typeface="Calibri"/>
+              </a:rPr>
+              <a:t>create-spdx generates SBOM at build time</a:t>
+            </a:r>
+          </a:p>
+        </p:txBody>
+      </p:sp>
+      <p:sp>
+        <p:nvSpPr>
+          <p:cNvPr id="18" name="TextBox 17"/>
+          <p:cNvSpPr txBox="1"/>
+          <p:nvPr/>
+        </p:nvSpPr>
+        <p:spPr>
+          <a:xfrm>
+            <a:off x="1417320" y="5038344"/>
+            <a:ext cx="10058400" cy="320040"/>
+          </a:xfrm>
+          <a:prstGeom prst="rect">
+            <a:avLst/>
+          </a:prstGeom>
+          <a:noFill/>
+        </p:spPr>
+        <p:txBody>
+          <a:bodyPr wrap="square" lIns="45720" rIns="45720" anchor="t">
+            <a:spAutoFit/>
+          </a:bodyPr>
+          <a:lstStyle/>
+          <a:p>
+            <a:pPr algn="l"/>
+            <a:r>
+              <a:rPr sz="1300" b="0" i="0">
+                <a:solidFill>
+                  <a:srgbClr val="333333"/>
+                </a:solidFill>
+                <a:latin typeface="Calibri"/>
+              </a:rPr>
+              <a:t>One INHERIT line; required for EU CRA, US EO 14028, many enterprise customers</a:t>
+            </a:r>
+          </a:p>
+        </p:txBody>
+      </p:sp>
+      <p:sp>
+        <p:nvSpPr>
+          <p:cNvPr id="19" name="Rounded Rectangle 18"/>
+          <p:cNvSpPr/>
+          <p:nvPr/>
+        </p:nvSpPr>
+        <p:spPr>
+          <a:xfrm>
+            <a:off x="822960" y="5669280"/>
+            <a:ext cx="10561320" cy="640080"/>
+          </a:xfrm>
+          <a:prstGeom prst="roundRect">
+            <a:avLst/>
+          </a:prstGeom>
+          <a:solidFill>
+            <a:srgbClr val="FBE6F0"/>
+          </a:solidFill>
+          <a:ln>
+            <a:noFill/>
+          </a:ln>
+          <a:effectLst/>
+        </p:spPr>
+        <p:style>
+          <a:lnRef idx="1">
+            <a:schemeClr val="accent1"/>
+          </a:lnRef>
+          <a:fillRef idx="3">
+            <a:schemeClr val="accent1"/>
+          </a:fillRef>
+          <a:effectRef idx="2">
+            <a:schemeClr val="accent1"/>
+          </a:effectRef>
+          <a:fontRef idx="minor">
+            <a:schemeClr val="lt1"/>
+          </a:fontRef>
+        </p:style>
+        <p:txBody>
+          <a:bodyPr lIns="228600" rtlCol="0" anchor="ctr"/>
+          <a:lstStyle/>
+          <a:p>
+            <a:pPr algn="ctr"/>
+            <a:r>
+              <a:rPr sz="1400" b="1">
+                <a:solidFill>
+                  <a:srgbClr val="663399"/>
+                </a:solidFill>
+                <a:latin typeface="Calibri"/>
+              </a:rPr>
+              <a:t>Next session  →  </a:t>
+            </a:r>
+            <a:r>
+              <a:rPr sz="1400">
+                <a:solidFill>
+                  <a:srgbClr val="333333"/>
+                </a:solidFill>
+                <a:latin typeface="Calibri"/>
+              </a:rPr>
+              <a:t>CVE Triage (30 min)</a:t>
+            </a:r>
+          </a:p>
+        </p:txBody>
+      </p:sp>
+    </p:spTree>
+  </p:cSld>
+  <p:clrMapOvr>
+    <a:masterClrMapping/>
+  </p:clrMapOvr>
+</p:sld>
+</file>
+
+<file path=ppt/slides/slide2.xml><?xml version="1.0" encoding="utf-8"?>
+<p:sld xmlns:a="http://schemas.openxmlformats.org/drawingml/2006/main" xmlns:r="http://schemas.openxmlformats.org/officeDocument/2006/relationships" xmlns:p="http://schemas.openxmlformats.org/presentationml/2006/main">
+  <p:cSld>
+    <p:spTree>
+      <p:nvGrpSpPr>
+        <p:cNvPr id="1" name=""/>
+        <p:cNvGrpSpPr/>
+        <p:nvPr/>
+      </p:nvGrpSpPr>
+      <p:grpSpPr>
+        <a:xfrm>
+          <a:off x="0" y="0"/>
+          <a:ext cx="0" cy="0"/>
+          <a:chOff x="0" y="0"/>
+          <a:chExt cx="0" cy="0"/>
+        </a:xfrm>
+      </p:grpSpPr>
+      <p:sp>
+        <p:nvSpPr>
+          <p:cNvPr id="2" name="Title 1"/>
+          <p:cNvSpPr>
+            <a:spLocks noGrp="1"/>
+          </p:cNvSpPr>
+          <p:nvPr>
+            <p:ph type="title"/>
+          </p:nvPr>
+        </p:nvSpPr>
+        <p:spPr/>
+        <p:txBody>
+          <a:bodyPr/>
+          <a:lstStyle/>
+          <a:p>
+            <a:r>
+              <a:rPr sz="3200" b="1">
+                <a:solidFill>
+                  <a:srgbClr val="CC0066"/>
+                </a:solidFill>
+                <a:latin typeface="Calibri"/>
+              </a:rPr>
+              <a:t>Session Agenda</a:t>
+            </a:r>
+          </a:p>
+        </p:txBody>
+      </p:sp>
+      <p:sp>
+        <p:nvSpPr>
+          <p:cNvPr id="3" name="TextBox 2"/>
+          <p:cNvSpPr txBox="1"/>
+          <p:nvPr/>
+        </p:nvSpPr>
+        <p:spPr>
+          <a:xfrm>
+            <a:off x="822960" y="1463040"/>
+            <a:ext cx="10515600" cy="5029200"/>
+          </a:xfrm>
+          <a:prstGeom prst="rect">
+            <a:avLst/>
+          </a:prstGeom>
+          <a:noFill/>
+        </p:spPr>
+        <p:txBody>
+          <a:bodyPr wrap="square" lIns="45720" rIns="45720">
+            <a:spAutoFit/>
+          </a:bodyPr>
+          <a:lstStyle/>
+          <a:p>
+            <a:pPr>
+              <a:spcAft>
+                <a:spcPts val="600"/>
+              </a:spcAft>
+            </a:pPr>
+            <a:r>
+              <a:rPr sz="2000" b="0" i="0">
+                <a:solidFill>
+                  <a:srgbClr val="333333"/>
+                </a:solidFill>
+                <a:latin typeface="Calibri"/>
+              </a:rPr>
+              <a:t>1.  Why license compliance matters now</a:t>
+            </a:r>
+          </a:p>
+          <a:p>
+            <a:pPr>
+              <a:spcAft>
+                <a:spcPts val="600"/>
+              </a:spcAft>
+            </a:pPr>
+            <a:r>
+              <a:rPr sz="2000" b="0" i="0">
+                <a:solidFill>
+                  <a:srgbClr val="333333"/>
+                </a:solidFill>
+                <a:latin typeface="Calibri"/>
+              </a:rPr>
+              <a:t>2.  SPDX identifiers in recipes</a:t>
+            </a:r>
+          </a:p>
+          <a:p>
+            <a:pPr>
+              <a:spcAft>
+                <a:spcPts val="600"/>
+              </a:spcAft>
+            </a:pPr>
+            <a:r>
+              <a:rPr sz="2000" b="0" i="0">
+                <a:solidFill>
+                  <a:srgbClr val="333333"/>
+                </a:solidFill>
+                <a:latin typeface="Calibri"/>
+              </a:rPr>
+              <a:t>3.  LICENSE and LIC_FILES_CHKSUM</a:t>
+            </a:r>
+          </a:p>
+          <a:p>
+            <a:pPr>
+              <a:spcAft>
+                <a:spcPts val="600"/>
+              </a:spcAft>
+            </a:pPr>
+            <a:r>
+              <a:rPr sz="2000" b="0" i="0">
+                <a:solidFill>
+                  <a:srgbClr val="333333"/>
+                </a:solidFill>
+                <a:latin typeface="Calibri"/>
+              </a:rPr>
+              <a:t>4.  INCOMPATIBLE_LICENSE — policy enforcement</a:t>
+            </a:r>
+          </a:p>
+          <a:p>
+            <a:pPr>
+              <a:spcAft>
+                <a:spcPts val="600"/>
+              </a:spcAft>
+            </a:pPr>
+            <a:r>
+              <a:rPr sz="2000" b="0" i="0">
+                <a:solidFill>
+                  <a:srgbClr val="333333"/>
+                </a:solidFill>
+                <a:latin typeface="Calibri"/>
+              </a:rPr>
+              <a:t>5.  License manifests and audit reports</a:t>
+            </a:r>
+          </a:p>
+          <a:p>
+            <a:pPr>
+              <a:spcAft>
+                <a:spcPts val="600"/>
+              </a:spcAft>
+            </a:pPr>
+            <a:r>
+              <a:rPr sz="2000" b="0" i="0">
+                <a:solidFill>
+                  <a:srgbClr val="333333"/>
+                </a:solidFill>
+                <a:latin typeface="Calibri"/>
+              </a:rPr>
+              <a:t>6.  Third-party layer assessment</a:t>
+            </a:r>
+          </a:p>
+          <a:p>
+            <a:pPr>
+              <a:spcAft>
+                <a:spcPts val="600"/>
+              </a:spcAft>
+            </a:pPr>
+            <a:r>
+              <a:rPr sz="2000" b="0" i="0">
+                <a:solidFill>
+                  <a:srgbClr val="333333"/>
+                </a:solidFill>
+                <a:latin typeface="Calibri"/>
+              </a:rPr>
+              <a:t>7.  SBOM generation with create-spdx</a:t>
+            </a:r>
+          </a:p>
+          <a:p>
+            <a:pPr>
+              <a:spcAft>
+                <a:spcPts val="600"/>
+              </a:spcAft>
+            </a:pPr>
+            <a:r>
+              <a:rPr sz="2000" b="0" i="0">
+                <a:solidFill>
+                  <a:srgbClr val="333333"/>
+                </a:solidFill>
+                <a:latin typeface="Calibri"/>
+              </a:rPr>
+              <a:t>8.  What auditors actually ask for</a:t>
+            </a:r>
+          </a:p>
+        </p:txBody>
+      </p:sp>
+    </p:spTree>
+  </p:cSld>
+  <p:clrMapOvr>
+    <a:masterClrMapping/>
+  </p:clrMapOvr>
+</p:sld>
+</file>
+
+<file path=ppt/slides/slide3.xml><?xml version="1.0" encoding="utf-8"?>
+<p:sld xmlns:a="http://schemas.openxmlformats.org/drawingml/2006/main" xmlns:r="http://schemas.openxmlformats.org/officeDocument/2006/relationships" xmlns:p="http://schemas.openxmlformats.org/presentationml/2006/main">
+  <p:cSld>
+    <p:spTree>
+      <p:nvGrpSpPr>
+        <p:cNvPr id="1" name=""/>
+        <p:cNvGrpSpPr/>
+        <p:nvPr/>
+      </p:nvGrpSpPr>
+      <p:grpSpPr>
+        <a:xfrm>
+          <a:off x="0" y="0"/>
+          <a:ext cx="0" cy="0"/>
+          <a:chOff x="0" y="0"/>
+          <a:chExt cx="0" cy="0"/>
+        </a:xfrm>
+      </p:grpSpPr>
+      <p:sp>
+        <p:nvSpPr>
+          <p:cNvPr id="2" name="Title 1"/>
+          <p:cNvSpPr>
+            <a:spLocks noGrp="1"/>
+          </p:cNvSpPr>
+          <p:nvPr>
+            <p:ph type="title"/>
+          </p:nvPr>
+        </p:nvSpPr>
+        <p:spPr/>
+        <p:txBody>
+          <a:bodyPr/>
+          <a:lstStyle/>
+          <a:p>
+            <a:r>
+              <a:rPr sz="3200" b="1">
+                <a:solidFill>
+                  <a:srgbClr val="CC0066"/>
+                </a:solidFill>
+                <a:latin typeface="Calibri"/>
+              </a:rPr>
+              <a:t>Why License Compliance Now</a:t>
+            </a:r>
+          </a:p>
+        </p:txBody>
+      </p:sp>
+      <p:sp>
+        <p:nvSpPr>
+          <p:cNvPr id="3" name="TextBox 2"/>
+          <p:cNvSpPr txBox="1"/>
+          <p:nvPr/>
+        </p:nvSpPr>
+        <p:spPr>
+          <a:xfrm>
+            <a:off x="822960" y="1417320"/>
+            <a:ext cx="10515600" cy="365760"/>
+          </a:xfrm>
+          <a:prstGeom prst="rect">
+            <a:avLst/>
+          </a:prstGeom>
+          <a:noFill/>
+        </p:spPr>
+        <p:txBody>
+          <a:bodyPr wrap="square" lIns="45720" rIns="45720" anchor="t">
+            <a:spAutoFit/>
+          </a:bodyPr>
+          <a:lstStyle/>
+          <a:p>
+            <a:pPr algn="l"/>
+            <a:r>
+              <a:rPr sz="1500" b="0" i="1">
+                <a:solidFill>
+                  <a:srgbClr val="666666"/>
+                </a:solidFill>
+                <a:latin typeface="Calibri"/>
+              </a:rPr>
+              <a:t>What changed in the last few years.</a:t>
+            </a:r>
+          </a:p>
+        </p:txBody>
+      </p:sp>
+      <p:sp>
+        <p:nvSpPr>
+          <p:cNvPr id="4" name="TextBox 3"/>
+          <p:cNvSpPr txBox="1"/>
+          <p:nvPr/>
+        </p:nvSpPr>
+        <p:spPr>
+          <a:xfrm>
+            <a:off x="822960" y="1783080"/>
+            <a:ext cx="10515600" cy="3354765"/>
+          </a:xfrm>
+          <a:prstGeom prst="rect">
+            <a:avLst/>
+          </a:prstGeom>
+          <a:noFill/>
+        </p:spPr>
+        <p:txBody>
+          <a:bodyPr wrap="square" lIns="45720" rIns="45720">
+            <a:spAutoFit/>
+          </a:bodyPr>
+          <a:lstStyle/>
+          <a:p>
+            <a:pPr>
+              <a:spcAft>
+                <a:spcPts val="400"/>
+              </a:spcAft>
+            </a:pPr>
+            <a:r>
+              <a:rPr sz="2000" b="1" i="0">
+                <a:solidFill>
+                  <a:srgbClr val="CC0066"/>
+                </a:solidFill>
+                <a:latin typeface="Calibri"/>
+              </a:rPr>
+              <a:t>Regulatory pressure</a:t>
+            </a:r>
+          </a:p>
+          <a:p>
+            <a:pPr>
+              <a:spcAft>
+                <a:spcPts val="400"/>
+              </a:spcAft>
+            </a:pPr>
+            <a:r>
+              <a:rPr sz="1600" b="0" i="0">
+                <a:solidFill>
+                  <a:srgbClr val="333333"/>
+                </a:solidFill>
+                <a:latin typeface="Calibri"/>
+              </a:rPr>
+              <a:t>• US Executive Order 14028 — SBOM for federal procurement</a:t>
+            </a:r>
+          </a:p>
+          <a:p>
+            <a:pPr>
+              <a:spcAft>
+                <a:spcPts val="400"/>
+              </a:spcAft>
+            </a:pPr>
+            <a:r>
+              <a:rPr sz="1600" b="0" i="0">
+                <a:solidFill>
+                  <a:srgbClr val="333333"/>
+                </a:solidFill>
+                <a:latin typeface="Calibri"/>
+              </a:rPr>
+              <a:t>• EU Cyber Resilience Act (CRA) — SBOM required for connected products</a:t>
+            </a:r>
+          </a:p>
+          <a:p>
+            <a:pPr>
+              <a:spcAft>
+                <a:spcPts val="1000"/>
+              </a:spcAft>
+            </a:pPr>
+            <a:r>
+              <a:rPr sz="1600" b="0" i="0">
+                <a:solidFill>
+                  <a:srgbClr val="333333"/>
+                </a:solidFill>
+                <a:latin typeface="Calibri"/>
+              </a:rPr>
+              <a:t>• OpenChain ISO/IEC 5230 — supply chain compliance standard</a:t>
+            </a:r>
+          </a:p>
+          <a:p>
+            <a:pPr>
+              <a:spcAft>
+                <a:spcPts val="400"/>
+              </a:spcAft>
+            </a:pPr>
+            <a:r>
+              <a:rPr sz="2000" b="1" i="0">
+                <a:solidFill>
+                  <a:srgbClr val="CC0066"/>
+                </a:solidFill>
+                <a:latin typeface="Calibri"/>
+              </a:rPr>
+              <a:t>Customer expectations</a:t>
+            </a:r>
+          </a:p>
+          <a:p>
+            <a:pPr>
+              <a:spcAft>
+                <a:spcPts val="400"/>
+              </a:spcAft>
+            </a:pPr>
+            <a:r>
+              <a:rPr sz="1600" b="0" i="0">
+                <a:solidFill>
+                  <a:srgbClr val="333333"/>
+                </a:solidFill>
+                <a:latin typeface="Calibri"/>
+              </a:rPr>
+              <a:t>• Enterprise buyers demand SBOM with shipment</a:t>
+            </a:r>
+          </a:p>
+          <a:p>
+            <a:pPr>
+              <a:spcAft>
+                <a:spcPts val="400"/>
+              </a:spcAft>
+            </a:pPr>
+            <a:r>
+              <a:rPr sz="1600" b="0" i="0">
+                <a:solidFill>
+                  <a:srgbClr val="333333"/>
+                </a:solidFill>
+                <a:latin typeface="Calibri"/>
+              </a:rPr>
+              <a:t>• Compliance teams ask for license manifests pre-purchase</a:t>
+            </a:r>
+          </a:p>
+          <a:p>
+            <a:pPr>
+              <a:spcAft>
+                <a:spcPts val="1000"/>
+              </a:spcAft>
+            </a:pPr>
+            <a:r>
+              <a:rPr sz="1600" b="0" i="0">
+                <a:solidFill>
+                  <a:srgbClr val="333333"/>
+                </a:solidFill>
+                <a:latin typeface="Calibri"/>
+              </a:rPr>
+              <a:t>• Penalty for non-compliance: lost deals, recalls, lawsuits</a:t>
+            </a:r>
+          </a:p>
+          <a:p>
+            <a:pPr>
+              <a:spcAft>
+                <a:spcPts val="400"/>
+              </a:spcAft>
+            </a:pPr>
+            <a:r>
+              <a:rPr sz="2000" b="1" i="0">
+                <a:solidFill>
+                  <a:srgbClr val="663399"/>
+                </a:solidFill>
+                <a:latin typeface="Calibri"/>
+              </a:rPr>
+              <a:t>The good news</a:t>
+            </a:r>
+          </a:p>
+          <a:p>
+            <a:pPr>
+              <a:spcAft>
+                <a:spcPts val="400"/>
+              </a:spcAft>
+            </a:pPr>
+            <a:r>
+              <a:rPr sz="1600" b="0" i="0">
+                <a:solidFill>
+                  <a:srgbClr val="333333"/>
+                </a:solidFill>
+                <a:latin typeface="Calibri"/>
+              </a:rPr>
+              <a:t>Yocto has all the tooling built in. You just need to enable it.</a:t>
+            </a:r>
+          </a:p>
+        </p:txBody>
+      </p:sp>
+    </p:spTree>
+  </p:cSld>
+  <p:clrMapOvr>
+    <a:masterClrMapping/>
+  </p:clrMapOvr>
+</p:sld>
+</file>
+
+<file path=ppt/slides/slide4.xml><?xml version="1.0" encoding="utf-8"?>
+<p:sld xmlns:a="http://schemas.openxmlformats.org/drawingml/2006/main" xmlns:r="http://schemas.openxmlformats.org/officeDocument/2006/relationships" xmlns:p="http://schemas.openxmlformats.org/presentationml/2006/main">
+  <p:cSld>
+    <p:spTree>
+      <p:nvGrpSpPr>
+        <p:cNvPr id="1" name=""/>
+        <p:cNvGrpSpPr/>
+        <p:nvPr/>
+      </p:nvGrpSpPr>
+      <p:grpSpPr>
+        <a:xfrm>
+          <a:off x="0" y="0"/>
+          <a:ext cx="0" cy="0"/>
+          <a:chOff x="0" y="0"/>
+          <a:chExt cx="0" cy="0"/>
+        </a:xfrm>
+      </p:grpSpPr>
+      <p:sp>
+        <p:nvSpPr>
+          <p:cNvPr id="2" name="Title 1"/>
+          <p:cNvSpPr>
+            <a:spLocks noGrp="1"/>
+          </p:cNvSpPr>
+          <p:nvPr>
+            <p:ph type="title"/>
+          </p:nvPr>
+        </p:nvSpPr>
+        <p:spPr/>
+        <p:txBody>
+          <a:bodyPr/>
+          <a:lstStyle/>
+          <a:p>
+            <a:r>
+              <a:rPr sz="3200" b="1">
+                <a:solidFill>
+                  <a:srgbClr val="CC0066"/>
+                </a:solidFill>
+                <a:latin typeface="Calibri"/>
+              </a:rPr>
+              <a:t>SPDX Identifiers in Recipes</a:t>
+            </a:r>
+          </a:p>
+        </p:txBody>
+      </p:sp>
+      <p:sp>
+        <p:nvSpPr>
+          <p:cNvPr id="3" name="TextBox 2"/>
+          <p:cNvSpPr txBox="1"/>
+          <p:nvPr/>
+        </p:nvSpPr>
+        <p:spPr>
+          <a:xfrm>
+            <a:off x="822960" y="1417320"/>
+            <a:ext cx="10515600" cy="365760"/>
+          </a:xfrm>
+          <a:prstGeom prst="rect">
+            <a:avLst/>
+          </a:prstGeom>
+          <a:noFill/>
+        </p:spPr>
+        <p:txBody>
+          <a:bodyPr wrap="square" lIns="45720" rIns="45720" anchor="t">
             <a:spAutoFit/>
           </a:bodyPr>
           <a:lstStyle/>
@@ -5296,6 +7570,7 @@
           <a:lstStyle/>
           <a:p>
             <a:pPr algn="ctr"/>
+            <a:endParaRPr/>
           </a:p>
         </p:txBody>
       </p:sp>
@@ -5340,6 +7615,7 @@
           <a:lstStyle/>
           <a:p>
             <a:pPr algn="ctr"/>
+            <a:endParaRPr/>
           </a:p>
         </p:txBody>
       </p:sp>
@@ -5352,7 +7628,7 @@
         <p:spPr>
           <a:xfrm>
             <a:off x="1005840" y="1874519"/>
-            <a:ext cx="10241280" cy="4389120"/>
+            <a:ext cx="10241280" cy="4616648"/>
           </a:xfrm>
           <a:prstGeom prst="rect">
             <a:avLst/>
@@ -5371,7 +7647,7 @@
               </a:spcAft>
             </a:pPr>
             <a:r>
-              <a:rPr sz="1100" i="1">
+              <a:rPr sz="1400" i="1">
                 <a:solidFill>
                   <a:srgbClr val="808080"/>
                 </a:solidFill>
@@ -5387,7 +7663,7 @@
               </a:spcAft>
             </a:pPr>
             <a:r>
-              <a:rPr sz="1100">
+              <a:rPr sz="1400">
                 <a:solidFill>
                   <a:srgbClr val="2D2D2D"/>
                 </a:solidFill>
@@ -5403,7 +7679,7 @@
               </a:spcAft>
             </a:pPr>
             <a:r>
-              <a:rPr sz="1100">
+              <a:rPr sz="1400">
                 <a:solidFill>
                   <a:srgbClr val="2D2D2D"/>
                 </a:solidFill>
@@ -5419,7 +7695,7 @@
               </a:spcAft>
             </a:pPr>
             <a:r>
-              <a:rPr sz="1100" i="1">
+              <a:rPr sz="1400" i="1">
                 <a:solidFill>
                   <a:srgbClr val="808080"/>
                 </a:solidFill>
@@ -5435,7 +7711,7 @@
               </a:spcAft>
             </a:pPr>
             <a:r>
-              <a:rPr sz="1100">
+              <a:rPr sz="1400">
                 <a:solidFill>
                   <a:srgbClr val="2D2D2D"/>
                 </a:solidFill>
@@ -5451,7 +7727,7 @@
               </a:spcAft>
             </a:pPr>
             <a:r>
-              <a:rPr sz="1100">
+              <a:rPr sz="1400">
                 <a:solidFill>
                   <a:srgbClr val="2D2D2D"/>
                 </a:solidFill>
@@ -5467,7 +7743,7 @@
               </a:spcAft>
             </a:pPr>
             <a:r>
-              <a:rPr sz="1100">
+              <a:rPr sz="1400">
                 <a:solidFill>
                   <a:srgbClr val="2D2D2D"/>
                 </a:solidFill>
@@ -5483,7 +7759,7 @@
               </a:spcAft>
             </a:pPr>
             <a:r>
-              <a:rPr sz="1100">
+              <a:rPr sz="1400">
                 <a:solidFill>
                   <a:srgbClr val="2D2D2D"/>
                 </a:solidFill>
@@ -5499,7 +7775,7 @@
               </a:spcAft>
             </a:pPr>
             <a:r>
-              <a:rPr sz="1100">
+              <a:rPr sz="1400">
                 <a:solidFill>
                   <a:srgbClr val="2D2D2D"/>
                 </a:solidFill>
@@ -5515,7 +7791,7 @@
               </a:spcAft>
             </a:pPr>
             <a:r>
-              <a:rPr sz="1100">
+              <a:rPr sz="1400">
                 <a:solidFill>
                   <a:srgbClr val="2D2D2D"/>
                 </a:solidFill>
@@ -5531,7 +7807,7 @@
               </a:spcAft>
             </a:pPr>
             <a:r>
-              <a:rPr sz="1100" i="1">
+              <a:rPr sz="1400" i="1">
                 <a:solidFill>
                   <a:srgbClr val="808080"/>
                 </a:solidFill>
@@ -5547,7 +7823,7 @@
               </a:spcAft>
             </a:pPr>
             <a:r>
-              <a:rPr sz="1100">
+              <a:rPr sz="1400">
                 <a:solidFill>
                   <a:srgbClr val="2D2D2D"/>
                 </a:solidFill>
@@ -5563,7 +7839,7 @@
               </a:spcAft>
             </a:pPr>
             <a:r>
-              <a:rPr sz="1100">
+              <a:rPr sz="1400">
                 <a:solidFill>
                   <a:srgbClr val="2D2D2D"/>
                 </a:solidFill>
@@ -5579,7 +7855,7 @@
               </a:spcAft>
             </a:pPr>
             <a:r>
-              <a:rPr sz="1100">
+              <a:rPr sz="1400">
                 <a:solidFill>
                   <a:srgbClr val="2D2D2D"/>
                 </a:solidFill>
@@ -5595,7 +7871,7 @@
               </a:spcAft>
             </a:pPr>
             <a:r>
-              <a:rPr sz="1100" i="1">
+              <a:rPr sz="1400" i="1">
                 <a:solidFill>
                   <a:srgbClr val="808080"/>
                 </a:solidFill>
@@ -5611,7 +7887,7 @@
               </a:spcAft>
             </a:pPr>
             <a:r>
-              <a:rPr sz="1100">
+              <a:rPr sz="1400">
                 <a:solidFill>
                   <a:srgbClr val="2D2D2D"/>
                 </a:solidFill>
@@ -5627,7 +7903,7 @@
               </a:spcAft>
             </a:pPr>
             <a:r>
-              <a:rPr sz="1100">
+              <a:rPr sz="1400">
                 <a:solidFill>
                   <a:srgbClr val="2D2D2D"/>
                 </a:solidFill>
@@ -5643,7 +7919,7 @@
               </a:spcAft>
             </a:pPr>
             <a:r>
-              <a:rPr sz="1100">
+              <a:rPr sz="1400">
                 <a:solidFill>
                   <a:srgbClr val="2D2D2D"/>
                 </a:solidFill>
@@ -5659,7 +7935,7 @@
               </a:spcAft>
             </a:pPr>
             <a:r>
-              <a:rPr sz="1100" i="1">
+              <a:rPr sz="1400" i="1">
                 <a:solidFill>
                   <a:srgbClr val="808080"/>
                 </a:solidFill>
@@ -5675,7 +7951,7 @@
               </a:spcAft>
             </a:pPr>
             <a:r>
-              <a:rPr sz="1100" i="1">
+              <a:rPr sz="1400" i="1">
                 <a:solidFill>
                   <a:srgbClr val="808080"/>
                 </a:solidFill>
@@ -5691,7 +7967,7 @@
               </a:spcAft>
             </a:pPr>
             <a:r>
-              <a:rPr sz="1100" i="1">
+              <a:rPr sz="1400" i="1">
                 <a:solidFill>
                   <a:srgbClr val="808080"/>
                 </a:solidFill>
@@ -5710,8 +7986,8 @@
 </p:sld>
 </file>
 
-<file path=ppt/slides/slide11.xml><?xml version="1.0" encoding="utf-8"?>
-<p:sld xmlns:a="http://schemas.openxmlformats.org/drawingml/2006/main" xmlns:p="http://schemas.openxmlformats.org/presentationml/2006/main" xmlns:r="http://schemas.openxmlformats.org/officeDocument/2006/relationships">
+<file path=ppt/slides/slide5.xml><?xml version="1.0" encoding="utf-8"?>
+<p:sld xmlns:a="http://schemas.openxmlformats.org/drawingml/2006/main" xmlns:r="http://schemas.openxmlformats.org/officeDocument/2006/relationships" xmlns:p="http://schemas.openxmlformats.org/presentationml/2006/main">
   <p:cSld>
     <p:spTree>
       <p:nvGrpSpPr>
@@ -5719,7 +7995,14 @@
         <p:cNvGrpSpPr/>
         <p:nvPr/>
       </p:nvGrpSpPr>
-      <p:grpSpPr/>
+      <p:grpSpPr>
+        <a:xfrm>
+          <a:off x="0" y="0"/>
+          <a:ext cx="0" cy="0"/>
+          <a:chOff x="0" y="0"/>
+          <a:chExt cx="0" cy="0"/>
+        </a:xfrm>
+      </p:grpSpPr>
       <p:sp>
         <p:nvSpPr>
           <p:cNvPr id="2" name="Title 1"/>
@@ -5764,7 +8047,7 @@
           <a:noFill/>
         </p:spPr>
         <p:txBody>
-          <a:bodyPr wrap="square" anchor="t" lIns="45720" rIns="45720">
+          <a:bodyPr wrap="square" lIns="45720" rIns="45720" anchor="t">
             <a:spAutoFit/>
           </a:bodyPr>
           <a:lstStyle/>
@@ -5825,6 +8108,7 @@
           <a:lstStyle/>
           <a:p>
             <a:pPr algn="ctr"/>
+            <a:endParaRPr/>
           </a:p>
         </p:txBody>
       </p:sp>
@@ -5869,6 +8153,7 @@
           <a:lstStyle/>
           <a:p>
             <a:pPr algn="ctr"/>
+            <a:endParaRPr/>
           </a:p>
         </p:txBody>
       </p:sp>
@@ -5881,7 +8166,7 @@
         <p:spPr>
           <a:xfrm>
             <a:off x="1005840" y="1874519"/>
-            <a:ext cx="10241280" cy="4389120"/>
+            <a:ext cx="10241280" cy="4401205"/>
           </a:xfrm>
           <a:prstGeom prst="rect">
             <a:avLst/>
@@ -5900,7 +8185,7 @@
               </a:spcAft>
             </a:pPr>
             <a:r>
-              <a:rPr sz="1100" i="1">
+              <a:rPr sz="1400" i="1">
                 <a:solidFill>
                   <a:srgbClr val="808080"/>
                 </a:solidFill>
@@ -5916,7 +8201,7 @@
               </a:spcAft>
             </a:pPr>
             <a:r>
-              <a:rPr sz="1100">
+              <a:rPr sz="1400">
                 <a:solidFill>
                   <a:srgbClr val="2D2D2D"/>
                 </a:solidFill>
@@ -5932,7 +8217,7 @@
               </a:spcAft>
             </a:pPr>
             <a:r>
-              <a:rPr sz="1100">
+              <a:rPr sz="1400">
                 <a:solidFill>
                   <a:srgbClr val="2D2D2D"/>
                 </a:solidFill>
@@ -5948,7 +8233,7 @@
               </a:spcAft>
             </a:pPr>
             <a:r>
-              <a:rPr sz="1100">
+              <a:rPr sz="1400">
                 <a:solidFill>
                   <a:srgbClr val="2D2D2D"/>
                 </a:solidFill>
@@ -5964,7 +8249,7 @@
               </a:spcAft>
             </a:pPr>
             <a:r>
-              <a:rPr sz="1100">
+              <a:rPr sz="1400">
                 <a:solidFill>
                   <a:srgbClr val="2D2D2D"/>
                 </a:solidFill>
@@ -5980,7 +8265,7 @@
               </a:spcAft>
             </a:pPr>
             <a:r>
-              <a:rPr sz="1100" i="1">
+              <a:rPr sz="1400" i="1">
                 <a:solidFill>
                   <a:srgbClr val="808080"/>
                 </a:solidFill>
@@ -5996,7 +8281,7 @@
               </a:spcAft>
             </a:pPr>
             <a:r>
-              <a:rPr sz="1100">
+              <a:rPr sz="1400">
                 <a:solidFill>
                   <a:srgbClr val="2D2D2D"/>
                 </a:solidFill>
@@ -6012,7 +8297,7 @@
               </a:spcAft>
             </a:pPr>
             <a:r>
-              <a:rPr sz="1100">
+              <a:rPr sz="1400">
                 <a:solidFill>
                   <a:srgbClr val="2D2D2D"/>
                 </a:solidFill>
@@ -6028,7 +8313,7 @@
               </a:spcAft>
             </a:pPr>
             <a:r>
-              <a:rPr sz="1100">
+              <a:rPr sz="1400">
                 <a:solidFill>
                   <a:srgbClr val="2D2D2D"/>
                 </a:solidFill>
@@ -6044,7 +8329,7 @@
               </a:spcAft>
             </a:pPr>
             <a:r>
-              <a:rPr sz="1100">
+              <a:rPr sz="1400">
                 <a:solidFill>
                   <a:srgbClr val="2D2D2D"/>
                 </a:solidFill>
@@ -6060,7 +8345,7 @@
               </a:spcAft>
             </a:pPr>
             <a:r>
-              <a:rPr sz="1100">
+              <a:rPr sz="1400">
                 <a:solidFill>
                   <a:srgbClr val="2D2D2D"/>
                 </a:solidFill>
@@ -6076,7 +8361,7 @@
               </a:spcAft>
             </a:pPr>
             <a:r>
-              <a:rPr sz="1100">
+              <a:rPr sz="1400">
                 <a:solidFill>
                   <a:srgbClr val="2D2D2D"/>
                 </a:solidFill>
@@ -6092,7 +8377,7 @@
               </a:spcAft>
             </a:pPr>
             <a:r>
-              <a:rPr sz="1100" i="1">
+              <a:rPr sz="1400" i="1">
                 <a:solidFill>
                   <a:srgbClr val="808080"/>
                 </a:solidFill>
@@ -6108,7 +8393,7 @@
               </a:spcAft>
             </a:pPr>
             <a:r>
-              <a:rPr sz="1100" i="1">
+              <a:rPr sz="1400" i="1">
                 <a:solidFill>
                   <a:srgbClr val="808080"/>
                 </a:solidFill>
@@ -6124,7 +8409,7 @@
               </a:spcAft>
             </a:pPr>
             <a:r>
-              <a:rPr sz="1100" i="1">
+              <a:rPr sz="1400" i="1">
                 <a:solidFill>
                   <a:srgbClr val="808080"/>
                 </a:solidFill>
@@ -6140,7 +8425,7 @@
               </a:spcAft>
             </a:pPr>
             <a:r>
-              <a:rPr sz="1100" i="1">
+              <a:rPr sz="1400" i="1">
                 <a:solidFill>
                   <a:srgbClr val="808080"/>
                 </a:solidFill>
@@ -6156,7 +8441,7 @@
               </a:spcAft>
             </a:pPr>
             <a:r>
-              <a:rPr sz="1100">
+              <a:rPr sz="1400">
                 <a:solidFill>
                   <a:srgbClr val="2D2D2D"/>
                 </a:solidFill>
@@ -6172,7 +8457,7 @@
               </a:spcAft>
             </a:pPr>
             <a:r>
-              <a:rPr sz="1100" i="1">
+              <a:rPr sz="1400" i="1">
                 <a:solidFill>
                   <a:srgbClr val="808080"/>
                 </a:solidFill>
@@ -6188,7 +8473,7 @@
               </a:spcAft>
             </a:pPr>
             <a:r>
-              <a:rPr sz="1100" i="1">
+              <a:rPr sz="1400" i="1">
                 <a:solidFill>
                   <a:srgbClr val="808080"/>
                 </a:solidFill>
@@ -6204,7 +8489,7 @@
               </a:spcAft>
             </a:pPr>
             <a:r>
-              <a:rPr sz="1100" i="1">
+              <a:rPr sz="1400" i="1">
                 <a:solidFill>
                   <a:srgbClr val="808080"/>
                 </a:solidFill>
@@ -6223,8 +8508,8 @@
 </p:sld>
 </file>
 
-<file path=ppt/slides/slide12.xml><?xml version="1.0" encoding="utf-8"?>
-<p:sld xmlns:a="http://schemas.openxmlformats.org/drawingml/2006/main" xmlns:p="http://schemas.openxmlformats.org/presentationml/2006/main" xmlns:r="http://schemas.openxmlformats.org/officeDocument/2006/relationships">
+<file path=ppt/slides/slide6.xml><?xml version="1.0" encoding="utf-8"?>
+<p:sld xmlns:a="http://schemas.openxmlformats.org/drawingml/2006/main" xmlns:r="http://schemas.openxmlformats.org/officeDocument/2006/relationships" xmlns:p="http://schemas.openxmlformats.org/presentationml/2006/main">
   <p:cSld>
     <p:spTree>
       <p:nvGrpSpPr>
@@ -6232,7 +8517,14 @@
         <p:cNvGrpSpPr/>
         <p:nvPr/>
       </p:nvGrpSpPr>
-      <p:grpSpPr/>
+      <p:grpSpPr>
+        <a:xfrm>
+          <a:off x="0" y="0"/>
+          <a:ext cx="0" cy="0"/>
+          <a:chOff x="0" y="0"/>
+          <a:chExt cx="0" cy="0"/>
+        </a:xfrm>
+      </p:grpSpPr>
       <p:sp>
         <p:nvSpPr>
           <p:cNvPr id="2" name="Title 1"/>
@@ -6277,7 +8569,7 @@
           <a:noFill/>
         </p:spPr>
         <p:txBody>
-          <a:bodyPr wrap="square" anchor="t" lIns="45720" rIns="45720">
+          <a:bodyPr wrap="square" lIns="45720" rIns="45720" anchor="t">
             <a:spAutoFit/>
           </a:bodyPr>
           <a:lstStyle/>
@@ -6338,6 +8630,7 @@
           <a:lstStyle/>
           <a:p>
             <a:pPr algn="ctr"/>
+            <a:endParaRPr/>
           </a:p>
         </p:txBody>
       </p:sp>
@@ -6382,6 +8675,7 @@
           <a:lstStyle/>
           <a:p>
             <a:pPr algn="ctr"/>
+            <a:endParaRPr/>
           </a:p>
         </p:txBody>
       </p:sp>
@@ -6394,7 +8688,7 @@
         <p:spPr>
           <a:xfrm>
             <a:off x="1005840" y="1874519"/>
-            <a:ext cx="10241280" cy="4389120"/>
+            <a:ext cx="10241280" cy="4401205"/>
           </a:xfrm>
           <a:prstGeom prst="rect">
             <a:avLst/>
@@ -6413,7 +8707,7 @@
               </a:spcAft>
             </a:pPr>
             <a:r>
-              <a:rPr sz="1100" i="1">
+              <a:rPr sz="1400" i="1">
                 <a:solidFill>
                   <a:srgbClr val="808080"/>
                 </a:solidFill>
@@ -6429,7 +8723,7 @@
               </a:spcAft>
             </a:pPr>
             <a:r>
-              <a:rPr sz="1100">
+              <a:rPr sz="1400">
                 <a:solidFill>
                   <a:srgbClr val="2D2D2D"/>
                 </a:solidFill>
@@ -6445,7 +8739,7 @@
               </a:spcAft>
             </a:pPr>
             <a:r>
-              <a:rPr sz="1100" i="1">
+              <a:rPr sz="1400" i="1">
                 <a:solidFill>
                   <a:srgbClr val="808080"/>
                 </a:solidFill>
@@ -6461,7 +8755,7 @@
               </a:spcAft>
             </a:pPr>
             <a:r>
-              <a:rPr sz="1100">
+              <a:rPr sz="1400">
                 <a:solidFill>
                   <a:srgbClr val="2D2D2D"/>
                 </a:solidFill>
@@ -6477,7 +8771,7 @@
               </a:spcAft>
             </a:pPr>
             <a:r>
-              <a:rPr sz="1100">
+              <a:rPr sz="1400">
                 <a:solidFill>
                   <a:srgbClr val="2D2D2D"/>
                 </a:solidFill>
@@ -6493,7 +8787,7 @@
               </a:spcAft>
             </a:pPr>
             <a:r>
-              <a:rPr sz="1100" i="1">
+              <a:rPr sz="1400" i="1">
                 <a:solidFill>
                   <a:srgbClr val="808080"/>
                 </a:solidFill>
@@ -6509,7 +8803,7 @@
               </a:spcAft>
             </a:pPr>
             <a:r>
-              <a:rPr sz="1100" i="1">
+              <a:rPr sz="1400" i="1">
                 <a:solidFill>
                   <a:srgbClr val="808080"/>
                 </a:solidFill>
@@ -6525,7 +8819,7 @@
               </a:spcAft>
             </a:pPr>
             <a:r>
-              <a:rPr sz="1100" i="1">
+              <a:rPr sz="1400" i="1">
                 <a:solidFill>
                   <a:srgbClr val="808080"/>
                 </a:solidFill>
@@ -6541,7 +8835,7 @@
               </a:spcAft>
             </a:pPr>
             <a:r>
-              <a:rPr sz="1100">
+              <a:rPr sz="1400">
                 <a:solidFill>
                   <a:srgbClr val="2D2D2D"/>
                 </a:solidFill>
@@ -6557,7 +8851,7 @@
               </a:spcAft>
             </a:pPr>
             <a:r>
-              <a:rPr sz="1100" i="1">
+              <a:rPr sz="1400" i="1">
                 <a:solidFill>
                   <a:srgbClr val="808080"/>
                 </a:solidFill>
@@ -6573,7 +8867,7 @@
               </a:spcAft>
             </a:pPr>
             <a:r>
-              <a:rPr sz="1100">
+              <a:rPr sz="1400">
                 <a:solidFill>
                   <a:srgbClr val="2D2D2D"/>
                 </a:solidFill>
@@ -6589,7 +8883,7 @@
               </a:spcAft>
             </a:pPr>
             <a:r>
-              <a:rPr sz="1100">
+              <a:rPr sz="1400">
                 <a:solidFill>
                   <a:srgbClr val="2D2D2D"/>
                 </a:solidFill>
@@ -6605,7 +8899,7 @@
               </a:spcAft>
             </a:pPr>
             <a:r>
-              <a:rPr sz="1100" i="1">
+              <a:rPr sz="1400" i="1">
                 <a:solidFill>
                   <a:srgbClr val="808080"/>
                 </a:solidFill>
@@ -6621,7 +8915,7 @@
               </a:spcAft>
             </a:pPr>
             <a:r>
-              <a:rPr sz="1100" i="1">
+              <a:rPr sz="1400" i="1">
                 <a:solidFill>
                   <a:srgbClr val="808080"/>
                 </a:solidFill>
@@ -6637,7 +8931,7 @@
               </a:spcAft>
             </a:pPr>
             <a:r>
-              <a:rPr sz="1100">
+              <a:rPr sz="1400">
                 <a:solidFill>
                   <a:srgbClr val="2D2D2D"/>
                 </a:solidFill>
@@ -6653,7 +8947,7 @@
               </a:spcAft>
             </a:pPr>
             <a:r>
-              <a:rPr sz="1100" i="1">
+              <a:rPr sz="1400" i="1">
                 <a:solidFill>
                   <a:srgbClr val="808080"/>
                 </a:solidFill>
@@ -6669,7 +8963,7 @@
               </a:spcAft>
             </a:pPr>
             <a:r>
-              <a:rPr sz="1100">
+              <a:rPr sz="1400">
                 <a:solidFill>
                   <a:srgbClr val="2D2D2D"/>
                 </a:solidFill>
@@ -6685,7 +8979,7 @@
               </a:spcAft>
             </a:pPr>
             <a:r>
-              <a:rPr sz="1100">
+              <a:rPr sz="1400">
                 <a:solidFill>
                   <a:srgbClr val="2D2D2D"/>
                 </a:solidFill>
@@ -6701,7 +8995,7 @@
               </a:spcAft>
             </a:pPr>
             <a:r>
-              <a:rPr sz="1100" i="1">
+              <a:rPr sz="1400" i="1">
                 <a:solidFill>
                   <a:srgbClr val="808080"/>
                 </a:solidFill>
@@ -6717,7 +9011,7 @@
               </a:spcAft>
             </a:pPr>
             <a:r>
-              <a:rPr sz="1100">
+              <a:rPr sz="1400">
                 <a:solidFill>
                   <a:srgbClr val="2D2D2D"/>
                 </a:solidFill>
@@ -6736,8 +9030,8 @@
 </p:sld>
 </file>
 
-<file path=ppt/slides/slide13.xml><?xml version="1.0" encoding="utf-8"?>
-<p:sld xmlns:a="http://schemas.openxmlformats.org/drawingml/2006/main" xmlns:p="http://schemas.openxmlformats.org/presentationml/2006/main" xmlns:r="http://schemas.openxmlformats.org/officeDocument/2006/relationships">
+<file path=ppt/slides/slide7.xml><?xml version="1.0" encoding="utf-8"?>
+<p:sld xmlns:a="http://schemas.openxmlformats.org/drawingml/2006/main" xmlns:r="http://schemas.openxmlformats.org/officeDocument/2006/relationships" xmlns:p="http://schemas.openxmlformats.org/presentationml/2006/main">
   <p:cSld>
     <p:spTree>
       <p:nvGrpSpPr>
@@ -6745,7 +9039,14 @@
         <p:cNvGrpSpPr/>
         <p:nvPr/>
       </p:nvGrpSpPr>
-      <p:grpSpPr/>
+      <p:grpSpPr>
+        <a:xfrm>
+          <a:off x="0" y="0"/>
+          <a:ext cx="0" cy="0"/>
+          <a:chOff x="0" y="0"/>
+          <a:chExt cx="0" cy="0"/>
+        </a:xfrm>
+      </p:grpSpPr>
       <p:sp>
         <p:nvSpPr>
           <p:cNvPr id="2" name="Title 1"/>
@@ -6790,7 +9091,7 @@
           <a:noFill/>
         </p:spPr>
         <p:txBody>
-          <a:bodyPr wrap="square" anchor="t" lIns="45720" rIns="45720">
+          <a:bodyPr wrap="square" lIns="45720" rIns="45720" anchor="t">
             <a:spAutoFit/>
           </a:bodyPr>
           <a:lstStyle/>
@@ -6851,6 +9152,7 @@
           <a:lstStyle/>
           <a:p>
             <a:pPr algn="ctr"/>
+            <a:endParaRPr/>
           </a:p>
         </p:txBody>
       </p:sp>
@@ -6895,6 +9197,7 @@
           <a:lstStyle/>
           <a:p>
             <a:pPr algn="ctr"/>
+            <a:endParaRPr/>
           </a:p>
         </p:txBody>
       </p:sp>
@@ -6906,8 +9209,8 @@
         </p:nvSpPr>
         <p:spPr>
           <a:xfrm>
-            <a:off x="1005840" y="1874519"/>
-            <a:ext cx="10241280" cy="4389120"/>
+            <a:off x="1197864" y="1783080"/>
+            <a:ext cx="10241280" cy="4616648"/>
           </a:xfrm>
           <a:prstGeom prst="rect">
             <a:avLst/>
@@ -6926,7 +9229,7 @@
               </a:spcAft>
             </a:pPr>
             <a:r>
-              <a:rPr sz="1100" i="1">
+              <a:rPr sz="1400" i="1">
                 <a:solidFill>
                   <a:srgbClr val="808080"/>
                 </a:solidFill>
@@ -6942,7 +9245,7 @@
               </a:spcAft>
             </a:pPr>
             <a:r>
-              <a:rPr sz="1100">
+              <a:rPr sz="1400">
                 <a:solidFill>
                   <a:srgbClr val="2D2D2D"/>
                 </a:solidFill>
@@ -6958,7 +9261,7 @@
               </a:spcAft>
             </a:pPr>
             <a:r>
-              <a:rPr sz="1100">
+              <a:rPr sz="1400">
                 <a:solidFill>
                   <a:srgbClr val="2D2D2D"/>
                 </a:solidFill>
@@ -6974,7 +9277,7 @@
               </a:spcAft>
             </a:pPr>
             <a:r>
-              <a:rPr sz="1100" i="1">
+              <a:rPr sz="1400" i="1">
                 <a:solidFill>
                   <a:srgbClr val="808080"/>
                 </a:solidFill>
@@ -6990,7 +9293,7 @@
               </a:spcAft>
             </a:pPr>
             <a:r>
-              <a:rPr sz="1100">
+              <a:rPr sz="1400">
                 <a:solidFill>
                   <a:srgbClr val="2D2D2D"/>
                 </a:solidFill>
@@ -7006,7 +9309,7 @@
               </a:spcAft>
             </a:pPr>
             <a:r>
-              <a:rPr sz="1100">
+              <a:rPr sz="1400">
                 <a:solidFill>
                   <a:srgbClr val="2D2D2D"/>
                 </a:solidFill>
@@ -7022,7 +9325,7 @@
               </a:spcAft>
             </a:pPr>
             <a:r>
-              <a:rPr sz="1100" i="1">
+              <a:rPr sz="1400" i="1">
                 <a:solidFill>
                   <a:srgbClr val="808080"/>
                 </a:solidFill>
@@ -7038,7 +9341,7 @@
               </a:spcAft>
             </a:pPr>
             <a:r>
-              <a:rPr sz="1100" i="1">
+              <a:rPr sz="1400" i="1">
                 <a:solidFill>
                   <a:srgbClr val="808080"/>
                 </a:solidFill>
@@ -7054,7 +9357,7 @@
               </a:spcAft>
             </a:pPr>
             <a:r>
-              <a:rPr sz="1100" i="1">
+              <a:rPr sz="1400" i="1">
                 <a:solidFill>
                   <a:srgbClr val="808080"/>
                 </a:solidFill>
@@ -7070,7 +9373,7 @@
               </a:spcAft>
             </a:pPr>
             <a:r>
-              <a:rPr sz="1100">
+              <a:rPr sz="1400">
                 <a:solidFill>
                   <a:srgbClr val="2D2D2D"/>
                 </a:solidFill>
@@ -7086,7 +9389,7 @@
               </a:spcAft>
             </a:pPr>
             <a:r>
-              <a:rPr sz="1100">
+              <a:rPr sz="1400">
                 <a:solidFill>
                   <a:srgbClr val="2D2D2D"/>
                 </a:solidFill>
@@ -7102,7 +9405,7 @@
               </a:spcAft>
             </a:pPr>
             <a:r>
-              <a:rPr sz="1100" i="1">
+              <a:rPr sz="1400" i="1">
                 <a:solidFill>
                   <a:srgbClr val="808080"/>
                 </a:solidFill>
@@ -7118,7 +9421,7 @@
               </a:spcAft>
             </a:pPr>
             <a:r>
-              <a:rPr sz="1100" i="1">
+              <a:rPr sz="1400" i="1">
                 <a:solidFill>
                   <a:srgbClr val="808080"/>
                 </a:solidFill>
@@ -7134,7 +9437,7 @@
               </a:spcAft>
             </a:pPr>
             <a:r>
-              <a:rPr sz="1100" i="1">
+              <a:rPr sz="1400" i="1">
                 <a:solidFill>
                   <a:srgbClr val="808080"/>
                 </a:solidFill>
@@ -7150,7 +9453,7 @@
               </a:spcAft>
             </a:pPr>
             <a:r>
-              <a:rPr sz="1100" i="1">
+              <a:rPr sz="1400" i="1">
                 <a:solidFill>
                   <a:srgbClr val="808080"/>
                 </a:solidFill>
@@ -7166,7 +9469,7 @@
               </a:spcAft>
             </a:pPr>
             <a:r>
-              <a:rPr sz="1100" i="1">
+              <a:rPr sz="1400" i="1">
                 <a:solidFill>
                   <a:srgbClr val="808080"/>
                 </a:solidFill>
@@ -7182,7 +9485,7 @@
               </a:spcAft>
             </a:pPr>
             <a:r>
-              <a:rPr sz="1100">
+              <a:rPr sz="1400">
                 <a:solidFill>
                   <a:srgbClr val="2D2D2D"/>
                 </a:solidFill>
@@ -7198,7 +9501,7 @@
               </a:spcAft>
             </a:pPr>
             <a:r>
-              <a:rPr sz="1100" i="1">
+              <a:rPr sz="1400" i="1">
                 <a:solidFill>
                   <a:srgbClr val="808080"/>
                 </a:solidFill>
@@ -7214,7 +9517,7 @@
               </a:spcAft>
             </a:pPr>
             <a:r>
-              <a:rPr sz="1100">
+              <a:rPr sz="1400">
                 <a:solidFill>
                   <a:srgbClr val="2D2D2D"/>
                 </a:solidFill>
@@ -7230,7 +9533,7 @@
               </a:spcAft>
             </a:pPr>
             <a:r>
-              <a:rPr sz="1100">
+              <a:rPr sz="1400">
                 <a:solidFill>
                   <a:srgbClr val="2D2D2D"/>
                 </a:solidFill>
@@ -7246,7 +9549,7 @@
               </a:spcAft>
             </a:pPr>
             <a:r>
-              <a:rPr sz="1100" i="1">
+              <a:rPr sz="1400" i="1">
                 <a:solidFill>
                   <a:srgbClr val="808080"/>
                 </a:solidFill>
@@ -7265,8 +9568,8 @@
 </p:sld>
 </file>
 
-<file path=ppt/slides/slide14.xml><?xml version="1.0" encoding="utf-8"?>
-<p:sld xmlns:a="http://schemas.openxmlformats.org/drawingml/2006/main" xmlns:p="http://schemas.openxmlformats.org/presentationml/2006/main" xmlns:r="http://schemas.openxmlformats.org/officeDocument/2006/relationships">
+<file path=ppt/slides/slide8.xml><?xml version="1.0" encoding="utf-8"?>
+<p:sld xmlns:a="http://schemas.openxmlformats.org/drawingml/2006/main" xmlns:r="http://schemas.openxmlformats.org/officeDocument/2006/relationships" xmlns:p="http://schemas.openxmlformats.org/presentationml/2006/main">
   <p:cSld>
     <p:spTree>
       <p:nvGrpSpPr>
@@ -7274,7 +9577,14 @@
         <p:cNvGrpSpPr/>
         <p:nvPr/>
       </p:nvGrpSpPr>
-      <p:grpSpPr/>
+      <p:grpSpPr>
+        <a:xfrm>
+          <a:off x="0" y="0"/>
+          <a:ext cx="0" cy="0"/>
+          <a:chOff x="0" y="0"/>
+          <a:chExt cx="0" cy="0"/>
+        </a:xfrm>
+      </p:grpSpPr>
       <p:sp>
         <p:nvSpPr>
           <p:cNvPr id="2" name="Title 1"/>
@@ -7319,7 +9629,7 @@
           <a:noFill/>
         </p:spPr>
         <p:txBody>
-          <a:bodyPr wrap="square" anchor="t" lIns="45720" rIns="45720">
+          <a:bodyPr wrap="square" lIns="45720" rIns="45720" anchor="t">
             <a:spAutoFit/>
           </a:bodyPr>
           <a:lstStyle/>
@@ -7346,7 +9656,7 @@
         <p:spPr>
           <a:xfrm>
             <a:off x="822960" y="1783080"/>
-            <a:ext cx="10515600" cy="4572000"/>
+            <a:ext cx="10515600" cy="3872855"/>
           </a:xfrm>
           <a:prstGeom prst="rect">
             <a:avLst/>
@@ -7365,7 +9675,7 @@
               </a:spcAft>
             </a:pPr>
             <a:r>
-              <a:rPr sz="1500" b="1" i="0">
+              <a:rPr b="1" i="0">
                 <a:solidFill>
                   <a:srgbClr val="CC0066"/>
                 </a:solidFill>
@@ -7381,7 +9691,7 @@
               </a:spcAft>
             </a:pPr>
             <a:r>
-              <a:rPr sz="1300" b="0" i="0">
+              <a:rPr sz="1600" b="0" i="0">
                 <a:solidFill>
                   <a:srgbClr val="333333"/>
                 </a:solidFill>
@@ -7397,7 +9707,7 @@
               </a:spcAft>
             </a:pPr>
             <a:r>
-              <a:rPr sz="1200" b="0" i="0">
+              <a:rPr sz="1600" b="0" i="0">
                 <a:solidFill>
                   <a:srgbClr val="333333"/>
                 </a:solidFill>
@@ -7413,7 +9723,7 @@
               </a:spcAft>
             </a:pPr>
             <a:r>
-              <a:rPr sz="1300" b="0" i="0">
+              <a:rPr sz="1600" b="0" i="0">
                 <a:solidFill>
                   <a:srgbClr val="333333"/>
                 </a:solidFill>
@@ -7429,7 +9739,7 @@
               </a:spcAft>
             </a:pPr>
             <a:r>
-              <a:rPr sz="1200" b="0" i="0">
+              <a:rPr sz="1600" b="0" i="0">
                 <a:solidFill>
                   <a:srgbClr val="333333"/>
                 </a:solidFill>
@@ -7445,7 +9755,7 @@
               </a:spcAft>
             </a:pPr>
             <a:r>
-              <a:rPr sz="1300" b="0" i="0">
+              <a:rPr sz="1600" b="0" i="0">
                 <a:solidFill>
                   <a:srgbClr val="333333"/>
                 </a:solidFill>
@@ -7461,7 +9771,7 @@
               </a:spcAft>
             </a:pPr>
             <a:r>
-              <a:rPr sz="1200" b="0" i="0">
+              <a:rPr sz="1600" b="0" i="0">
                 <a:solidFill>
                   <a:srgbClr val="333333"/>
                 </a:solidFill>
@@ -7477,7 +9787,7 @@
               </a:spcAft>
             </a:pPr>
             <a:r>
-              <a:rPr sz="1200" b="0" i="0">
+              <a:rPr sz="1600" b="0" i="0">
                 <a:solidFill>
                   <a:srgbClr val="333333"/>
                 </a:solidFill>
@@ -7493,7 +9803,7 @@
               </a:spcAft>
             </a:pPr>
             <a:r>
-              <a:rPr sz="1200" b="0" i="0">
+              <a:rPr sz="1600" b="0" i="0">
                 <a:solidFill>
                   <a:srgbClr val="333333"/>
                 </a:solidFill>
@@ -7509,7 +9819,7 @@
               </a:spcAft>
             </a:pPr>
             <a:r>
-              <a:rPr sz="1300" b="0" i="0">
+              <a:rPr sz="1600" b="0" i="0">
                 <a:solidFill>
                   <a:srgbClr val="333333"/>
                 </a:solidFill>
@@ -7525,7 +9835,7 @@
               </a:spcAft>
             </a:pPr>
             <a:r>
-              <a:rPr sz="1200" b="0" i="0">
+              <a:rPr sz="1600" b="0" i="0">
                 <a:solidFill>
                   <a:srgbClr val="333333"/>
                 </a:solidFill>
@@ -7541,7 +9851,7 @@
               </a:spcAft>
             </a:pPr>
             <a:r>
-              <a:rPr sz="1300" b="1" i="0">
+              <a:rPr sz="1600" b="1" i="0">
                 <a:solidFill>
                   <a:srgbClr val="663399"/>
                 </a:solidFill>
@@ -7560,8 +9870,8 @@
 </p:sld>
 </file>
 
-<file path=ppt/slides/slide15.xml><?xml version="1.0" encoding="utf-8"?>
-<p:sld xmlns:a="http://schemas.openxmlformats.org/drawingml/2006/main" xmlns:p="http://schemas.openxmlformats.org/presentationml/2006/main" xmlns:r="http://schemas.openxmlformats.org/officeDocument/2006/relationships">
+<file path=ppt/slides/slide9.xml><?xml version="1.0" encoding="utf-8"?>
+<p:sld xmlns:a="http://schemas.openxmlformats.org/drawingml/2006/main" xmlns:r="http://schemas.openxmlformats.org/officeDocument/2006/relationships" xmlns:p="http://schemas.openxmlformats.org/presentationml/2006/main">
   <p:cSld>
     <p:spTree>
       <p:nvGrpSpPr>
@@ -7569,7 +9879,14 @@
         <p:cNvGrpSpPr/>
         <p:nvPr/>
       </p:nvGrpSpPr>
-      <p:grpSpPr/>
+      <p:grpSpPr>
+        <a:xfrm>
+          <a:off x="0" y="0"/>
+          <a:ext cx="0" cy="0"/>
+          <a:chOff x="0" y="0"/>
+          <a:chExt cx="0" cy="0"/>
+        </a:xfrm>
+      </p:grpSpPr>
       <p:sp>
         <p:nvSpPr>
           <p:cNvPr id="2" name="Title 1"/>
@@ -7614,7 +9931,7 @@
           <a:noFill/>
         </p:spPr>
         <p:txBody>
-          <a:bodyPr wrap="square" anchor="t" lIns="45720" rIns="45720">
+          <a:bodyPr wrap="square" lIns="45720" rIns="45720" anchor="t">
             <a:spAutoFit/>
           </a:bodyPr>
           <a:lstStyle/>
@@ -7675,6 +9992,7 @@
           <a:lstStyle/>
           <a:p>
             <a:pPr algn="ctr"/>
+            <a:endParaRPr/>
           </a:p>
         </p:txBody>
       </p:sp>
@@ -7719,6 +10037,7 @@
           <a:lstStyle/>
           <a:p>
             <a:pPr algn="ctr"/>
+            <a:endParaRPr/>
           </a:p>
         </p:txBody>
       </p:sp>
@@ -7730,8 +10049,8 @@
         </p:nvSpPr>
         <p:spPr>
           <a:xfrm>
-            <a:off x="1005840" y="1874519"/>
-            <a:ext cx="10241280" cy="4389120"/>
+            <a:off x="1271312" y="1783080"/>
+            <a:ext cx="10241280" cy="4832092"/>
           </a:xfrm>
           <a:prstGeom prst="rect">
             <a:avLst/>
@@ -7750,44 +10069,77 @@
               </a:spcAft>
             </a:pPr>
             <a:r>
-              <a:rPr sz="1100" i="1">
+              <a:rPr sz="1400" i="1" dirty="0">
                 <a:solidFill>
                   <a:srgbClr val="808080"/>
                 </a:solidFill>
                 <a:latin typeface="Consolas"/>
               </a:rPr>
-              <a:t># Enable in local.conf</a:t>
-            </a:r>
-          </a:p>
-          <a:p>
-            <a:pPr>
-              <a:spcAft>
-                <a:spcPts val="0"/>
-              </a:spcAft>
-            </a:pPr>
-            <a:r>
-              <a:rPr sz="1100">
+              <a:t># Enable in </a:t>
+            </a:r>
+            <a:r>
+              <a:rPr sz="1400" i="1" dirty="0" err="1">
+                <a:solidFill>
+                  <a:srgbClr val="808080"/>
+                </a:solidFill>
+                <a:latin typeface="Consolas"/>
+              </a:rPr>
+              <a:t>local.conf</a:t>
+            </a:r>
+            <a:endParaRPr sz="1400" i="1" dirty="0">
+              <a:solidFill>
+                <a:srgbClr val="808080"/>
+              </a:solidFill>
+              <a:latin typeface="Consolas"/>
+            </a:endParaRPr>
+          </a:p>
+          <a:p>
+            <a:pPr>
+              <a:spcAft>
+                <a:spcPts val="0"/>
+              </a:spcAft>
+            </a:pPr>
+            <a:r>
+              <a:rPr sz="1400" dirty="0">
                 <a:solidFill>
                   <a:srgbClr val="2D2D2D"/>
                 </a:solidFill>
                 <a:latin typeface="Consolas"/>
               </a:rPr>
-              <a:t>INHERIT += "create-spdx"</a:t>
-            </a:r>
-          </a:p>
-          <a:p>
-            <a:pPr>
-              <a:spcAft>
-                <a:spcPts val="0"/>
-              </a:spcAft>
-            </a:pPr>
-            <a:r>
-              <a:rPr sz="1100">
+              <a:t>INHERIT += "create-</a:t>
+            </a:r>
+            <a:r>
+              <a:rPr sz="1400" dirty="0" err="1">
                 <a:solidFill>
                   <a:srgbClr val="2D2D2D"/>
                 </a:solidFill>
                 <a:latin typeface="Consolas"/>
               </a:rPr>
+              <a:t>spdx</a:t>
+            </a:r>
+            <a:r>
+              <a:rPr sz="1400" dirty="0">
+                <a:solidFill>
+                  <a:srgbClr val="2D2D2D"/>
+                </a:solidFill>
+                <a:latin typeface="Consolas"/>
+              </a:rPr>
+              <a:t>"</a:t>
+            </a:r>
+          </a:p>
+          <a:p>
+            <a:pPr>
+              <a:spcAft>
+                <a:spcPts val="0"/>
+              </a:spcAft>
+            </a:pPr>
+            <a:r>
+              <a:rPr sz="1400" dirty="0">
+                <a:solidFill>
+                  <a:srgbClr val="2D2D2D"/>
+                </a:solidFill>
+                <a:latin typeface="Consolas"/>
+              </a:rPr>
               <a:t> </a:t>
             </a:r>
           </a:p>
@@ -7798,7 +10150,7 @@
               </a:spcAft>
             </a:pPr>
             <a:r>
-              <a:rPr sz="1100" i="1">
+              <a:rPr sz="1400" i="1" dirty="0">
                 <a:solidFill>
                   <a:srgbClr val="808080"/>
                 </a:solidFill>
@@ -7814,28 +10166,37 @@
               </a:spcAft>
             </a:pPr>
             <a:r>
-              <a:rPr sz="1100">
+              <a:rPr sz="1400" dirty="0" err="1">
                 <a:solidFill>
                   <a:srgbClr val="2D2D2D"/>
                 </a:solidFill>
                 <a:latin typeface="Consolas"/>
               </a:rPr>
-              <a:t>bitbake core-image-base</a:t>
-            </a:r>
-          </a:p>
-          <a:p>
-            <a:pPr>
-              <a:spcAft>
-                <a:spcPts val="0"/>
-              </a:spcAft>
-            </a:pPr>
-            <a:r>
-              <a:rPr sz="1100">
+              <a:t>bitbake</a:t>
+            </a:r>
+            <a:r>
+              <a:rPr sz="1400" dirty="0">
                 <a:solidFill>
                   <a:srgbClr val="2D2D2D"/>
                 </a:solidFill>
                 <a:latin typeface="Consolas"/>
               </a:rPr>
+              <a:t> core-image-base</a:t>
+            </a:r>
+          </a:p>
+          <a:p>
+            <a:pPr>
+              <a:spcAft>
+                <a:spcPts val="0"/>
+              </a:spcAft>
+            </a:pPr>
+            <a:r>
+              <a:rPr sz="1400" dirty="0">
+                <a:solidFill>
+                  <a:srgbClr val="2D2D2D"/>
+                </a:solidFill>
+                <a:latin typeface="Consolas"/>
+              </a:rPr>
               <a:t> </a:t>
             </a:r>
           </a:p>
@@ -7846,7 +10207,7 @@
               </a:spcAft>
             </a:pPr>
             <a:r>
-              <a:rPr sz="1100" i="1">
+              <a:rPr sz="1400" i="1" dirty="0">
                 <a:solidFill>
                   <a:srgbClr val="808080"/>
                 </a:solidFill>
@@ -7862,44 +10223,98 @@
               </a:spcAft>
             </a:pPr>
             <a:r>
-              <a:rPr sz="1100">
+              <a:rPr sz="1400" dirty="0">
                 <a:solidFill>
                   <a:srgbClr val="2D2D2D"/>
                 </a:solidFill>
                 <a:latin typeface="Consolas"/>
               </a:rPr>
-              <a:t>ls tmp/deploy/spdx/</a:t>
-            </a:r>
-          </a:p>
-          <a:p>
-            <a:pPr>
-              <a:spcAft>
-                <a:spcPts val="0"/>
-              </a:spcAft>
-            </a:pPr>
-            <a:r>
-              <a:rPr sz="1100" i="1">
+              <a:t>ls </a:t>
+            </a:r>
+            <a:r>
+              <a:rPr sz="1400" dirty="0" err="1">
+                <a:solidFill>
+                  <a:srgbClr val="2D2D2D"/>
+                </a:solidFill>
+                <a:latin typeface="Consolas"/>
+              </a:rPr>
+              <a:t>tmp</a:t>
+            </a:r>
+            <a:r>
+              <a:rPr sz="1400" dirty="0">
+                <a:solidFill>
+                  <a:srgbClr val="2D2D2D"/>
+                </a:solidFill>
+                <a:latin typeface="Consolas"/>
+              </a:rPr>
+              <a:t>/deploy/</a:t>
+            </a:r>
+            <a:r>
+              <a:rPr sz="1400" dirty="0" err="1">
+                <a:solidFill>
+                  <a:srgbClr val="2D2D2D"/>
+                </a:solidFill>
+                <a:latin typeface="Consolas"/>
+              </a:rPr>
+              <a:t>spdx</a:t>
+            </a:r>
+            <a:r>
+              <a:rPr sz="1400" dirty="0">
+                <a:solidFill>
+                  <a:srgbClr val="2D2D2D"/>
+                </a:solidFill>
+                <a:latin typeface="Consolas"/>
+              </a:rPr>
+              <a:t>/</a:t>
+            </a:r>
+          </a:p>
+          <a:p>
+            <a:pPr>
+              <a:spcAft>
+                <a:spcPts val="0"/>
+              </a:spcAft>
+            </a:pPr>
+            <a:r>
+              <a:rPr sz="1400" i="1" dirty="0">
                 <a:solidFill>
                   <a:srgbClr val="808080"/>
                 </a:solidFill>
                 <a:latin typeface="Consolas"/>
               </a:rPr>
-              <a:t># Per-recipe SPDX documents (.spdx.json)</a:t>
-            </a:r>
-          </a:p>
-          <a:p>
-            <a:pPr>
-              <a:spcAft>
-                <a:spcPts val="0"/>
-              </a:spcAft>
-            </a:pPr>
-            <a:r>
-              <a:rPr sz="1100" i="1">
+              <a:t># Per-recipe SPDX documents (.</a:t>
+            </a:r>
+            <a:r>
+              <a:rPr sz="1400" i="1" dirty="0" err="1">
                 <a:solidFill>
                   <a:srgbClr val="808080"/>
                 </a:solidFill>
                 <a:latin typeface="Consolas"/>
               </a:rPr>
+              <a:t>spdx.json</a:t>
+            </a:r>
+            <a:r>
+              <a:rPr sz="1400" i="1" dirty="0">
+                <a:solidFill>
+                  <a:srgbClr val="808080"/>
+                </a:solidFill>
+                <a:latin typeface="Consolas"/>
+              </a:rPr>
+              <a:t>)</a:t>
+            </a:r>
+          </a:p>
+          <a:p>
+            <a:pPr>
+              <a:spcAft>
+                <a:spcPts val="0"/>
+              </a:spcAft>
+            </a:pPr>
+            <a:r>
+              <a:rPr sz="1400" i="1" dirty="0">
+                <a:solidFill>
+                  <a:srgbClr val="808080"/>
+                </a:solidFill>
+                <a:latin typeface="Consolas"/>
+              </a:rPr>
               <a:t># Per-image SPDX (with all dependencies)</a:t>
             </a:r>
           </a:p>
@@ -7910,7 +10325,7 @@
               </a:spcAft>
             </a:pPr>
             <a:r>
-              <a:rPr sz="1100">
+              <a:rPr sz="1400" dirty="0">
                 <a:solidFill>
                   <a:srgbClr val="2D2D2D"/>
                 </a:solidFill>
@@ -7926,44 +10341,98 @@
               </a:spcAft>
             </a:pPr>
             <a:r>
-              <a:rPr sz="1100">
+              <a:rPr sz="1400" dirty="0">
                 <a:solidFill>
                   <a:srgbClr val="2D2D2D"/>
                 </a:solidFill>
                 <a:latin typeface="Consolas"/>
               </a:rPr>
-              <a:t>ls tmp/deploy/spdx/x86_64-linux/core-image-base/</a:t>
-            </a:r>
-          </a:p>
-          <a:p>
-            <a:pPr>
-              <a:spcAft>
-                <a:spcPts val="0"/>
-              </a:spcAft>
-            </a:pPr>
-            <a:r>
-              <a:rPr sz="1100" i="1">
+              <a:t>ls </a:t>
+            </a:r>
+            <a:r>
+              <a:rPr sz="1400" dirty="0" err="1">
+                <a:solidFill>
+                  <a:srgbClr val="2D2D2D"/>
+                </a:solidFill>
+                <a:latin typeface="Consolas"/>
+              </a:rPr>
+              <a:t>tmp</a:t>
+            </a:r>
+            <a:r>
+              <a:rPr sz="1400" dirty="0">
+                <a:solidFill>
+                  <a:srgbClr val="2D2D2D"/>
+                </a:solidFill>
+                <a:latin typeface="Consolas"/>
+              </a:rPr>
+              <a:t>/deploy/</a:t>
+            </a:r>
+            <a:r>
+              <a:rPr sz="1400" dirty="0" err="1">
+                <a:solidFill>
+                  <a:srgbClr val="2D2D2D"/>
+                </a:solidFill>
+                <a:latin typeface="Consolas"/>
+              </a:rPr>
+              <a:t>spdx</a:t>
+            </a:r>
+            <a:r>
+              <a:rPr sz="1400" dirty="0">
+                <a:solidFill>
+                  <a:srgbClr val="2D2D2D"/>
+                </a:solidFill>
+                <a:latin typeface="Consolas"/>
+              </a:rPr>
+              <a:t>/x86_64-linux/core-image-base/</a:t>
+            </a:r>
+          </a:p>
+          <a:p>
+            <a:pPr>
+              <a:spcAft>
+                <a:spcPts val="0"/>
+              </a:spcAft>
+            </a:pPr>
+            <a:r>
+              <a:rPr sz="1400" i="1" dirty="0">
                 <a:solidFill>
                   <a:srgbClr val="808080"/>
                 </a:solidFill>
                 <a:latin typeface="Consolas"/>
               </a:rPr>
-              <a:t># core-image-base.spdx.json     — the top-level document</a:t>
-            </a:r>
-          </a:p>
-          <a:p>
-            <a:pPr>
-              <a:spcAft>
-                <a:spcPts val="0"/>
-              </a:spcAft>
-            </a:pPr>
-            <a:r>
-              <a:rPr sz="1100" i="1">
+              <a:t># core-image-</a:t>
+            </a:r>
+            <a:r>
+              <a:rPr sz="1400" i="1" dirty="0" err="1">
                 <a:solidFill>
                   <a:srgbClr val="808080"/>
                 </a:solidFill>
                 <a:latin typeface="Consolas"/>
               </a:rPr>
+              <a:t>base.spdx.json</a:t>
+            </a:r>
+            <a:r>
+              <a:rPr sz="1400" i="1" dirty="0">
+                <a:solidFill>
+                  <a:srgbClr val="808080"/>
+                </a:solidFill>
+                <a:latin typeface="Consolas"/>
+              </a:rPr>
+              <a:t>     — the top-level document</a:t>
+            </a:r>
+          </a:p>
+          <a:p>
+            <a:pPr>
+              <a:spcAft>
+                <a:spcPts val="0"/>
+              </a:spcAft>
+            </a:pPr>
+            <a:r>
+              <a:rPr sz="1400" i="1" dirty="0">
+                <a:solidFill>
+                  <a:srgbClr val="808080"/>
+                </a:solidFill>
+                <a:latin typeface="Consolas"/>
+              </a:rPr>
               <a:t># Includes all package SPDX docs as references</a:t>
             </a:r>
           </a:p>
@@ -7974,7 +10443,7 @@
               </a:spcAft>
             </a:pPr>
             <a:r>
-              <a:rPr sz="1100">
+              <a:rPr sz="1400" dirty="0">
                 <a:solidFill>
                   <a:srgbClr val="2D2D2D"/>
                 </a:solidFill>
@@ -7990,60 +10459,138 @@
               </a:spcAft>
             </a:pPr>
             <a:r>
-              <a:rPr sz="1100" i="1">
+              <a:rPr sz="1400" i="1" dirty="0">
                 <a:solidFill>
                   <a:srgbClr val="808080"/>
                 </a:solidFill>
                 <a:latin typeface="Consolas"/>
               </a:rPr>
-              <a:t># Validate with spdx-tools</a:t>
-            </a:r>
-          </a:p>
-          <a:p>
-            <a:pPr>
-              <a:spcAft>
-                <a:spcPts val="0"/>
-              </a:spcAft>
-            </a:pPr>
-            <a:r>
-              <a:rPr sz="1100">
+              <a:t># Validate with </a:t>
+            </a:r>
+            <a:r>
+              <a:rPr sz="1400" i="1" dirty="0" err="1">
+                <a:solidFill>
+                  <a:srgbClr val="808080"/>
+                </a:solidFill>
+                <a:latin typeface="Consolas"/>
+              </a:rPr>
+              <a:t>spdx</a:t>
+            </a:r>
+            <a:r>
+              <a:rPr sz="1400" i="1" dirty="0">
+                <a:solidFill>
+                  <a:srgbClr val="808080"/>
+                </a:solidFill>
+                <a:latin typeface="Consolas"/>
+              </a:rPr>
+              <a:t>-tools</a:t>
+            </a:r>
+          </a:p>
+          <a:p>
+            <a:pPr>
+              <a:spcAft>
+                <a:spcPts val="0"/>
+              </a:spcAft>
+            </a:pPr>
+            <a:r>
+              <a:rPr sz="1400" dirty="0">
                 <a:solidFill>
                   <a:srgbClr val="2D2D2D"/>
                 </a:solidFill>
                 <a:latin typeface="Consolas"/>
               </a:rPr>
-              <a:t>pip install spdx-tools</a:t>
-            </a:r>
-          </a:p>
-          <a:p>
-            <a:pPr>
-              <a:spcAft>
-                <a:spcPts val="0"/>
-              </a:spcAft>
-            </a:pPr>
-            <a:r>
-              <a:rPr sz="1100">
+              <a:t>pip install </a:t>
+            </a:r>
+            <a:r>
+              <a:rPr sz="1400" dirty="0" err="1">
                 <a:solidFill>
                   <a:srgbClr val="2D2D2D"/>
                 </a:solidFill>
                 <a:latin typeface="Consolas"/>
               </a:rPr>
-              <a:t>pyspdxtools-parser --infile core-image-base.spdx.json</a:t>
-            </a:r>
-          </a:p>
-          <a:p>
-            <a:pPr>
-              <a:spcAft>
-                <a:spcPts val="0"/>
-              </a:spcAft>
-            </a:pPr>
-            <a:r>
-              <a:rPr sz="1100">
+              <a:t>spdx</a:t>
+            </a:r>
+            <a:r>
+              <a:rPr sz="1400" dirty="0">
                 <a:solidFill>
                   <a:srgbClr val="2D2D2D"/>
                 </a:solidFill>
                 <a:latin typeface="Consolas"/>
               </a:rPr>
+              <a:t>-tools</a:t>
+            </a:r>
+          </a:p>
+          <a:p>
+            <a:pPr>
+              <a:spcAft>
+                <a:spcPts val="0"/>
+              </a:spcAft>
+            </a:pPr>
+            <a:r>
+              <a:rPr sz="1400" dirty="0" err="1">
+                <a:solidFill>
+                  <a:srgbClr val="2D2D2D"/>
+                </a:solidFill>
+                <a:latin typeface="Consolas"/>
+              </a:rPr>
+              <a:t>pyspdxtools</a:t>
+            </a:r>
+            <a:r>
+              <a:rPr sz="1400" dirty="0">
+                <a:solidFill>
+                  <a:srgbClr val="2D2D2D"/>
+                </a:solidFill>
+                <a:latin typeface="Consolas"/>
+              </a:rPr>
+              <a:t>-parser --</a:t>
+            </a:r>
+            <a:r>
+              <a:rPr sz="1400" dirty="0" err="1">
+                <a:solidFill>
+                  <a:srgbClr val="2D2D2D"/>
+                </a:solidFill>
+                <a:latin typeface="Consolas"/>
+              </a:rPr>
+              <a:t>infile</a:t>
+            </a:r>
+            <a:r>
+              <a:rPr sz="1400" dirty="0">
+                <a:solidFill>
+                  <a:srgbClr val="2D2D2D"/>
+                </a:solidFill>
+                <a:latin typeface="Consolas"/>
+              </a:rPr>
+              <a:t> core-image-</a:t>
+            </a:r>
+            <a:r>
+              <a:rPr sz="1400" dirty="0" err="1">
+                <a:solidFill>
+                  <a:srgbClr val="2D2D2D"/>
+                </a:solidFill>
+                <a:latin typeface="Consolas"/>
+              </a:rPr>
+              <a:t>base.spdx.json</a:t>
+            </a:r>
+            <a:endParaRPr sz="1400" dirty="0">
+              <a:solidFill>
+                <a:srgbClr val="2D2D2D"/>
+              </a:solidFill>
+              <a:latin typeface="Consolas"/>
+            </a:endParaRPr>
+          </a:p>
+          <a:p>
+            <a:pPr>
+              <a:spcAft>
+                <a:spcPts val="0"/>
+              </a:spcAft>
+            </a:pPr>
+            <a:r>
+              <a:rPr sz="1400" dirty="0">
+                <a:solidFill>
+                  <a:srgbClr val="2D2D2D"/>
+                </a:solidFill>
+                <a:latin typeface="Consolas"/>
+              </a:rPr>
               <a:t> </a:t>
             </a:r>
           </a:p>
@@ -8054,7 +10601,7 @@
               </a:spcAft>
             </a:pPr>
             <a:r>
-              <a:rPr sz="1100" i="1">
+              <a:rPr sz="1400" i="1" dirty="0">
                 <a:solidFill>
                   <a:srgbClr val="808080"/>
                 </a:solidFill>
@@ -8070,2287 +10617,71 @@
               </a:spcAft>
             </a:pPr>
             <a:r>
-              <a:rPr sz="1100">
+              <a:rPr sz="1400" dirty="0" err="1">
                 <a:solidFill>
                   <a:srgbClr val="2D2D2D"/>
                 </a:solidFill>
                 <a:latin typeface="Consolas"/>
               </a:rPr>
-              <a:t>grype sbom:core-image-base.spdx.json</a:t>
-            </a:r>
-          </a:p>
-          <a:p>
-            <a:pPr>
-              <a:spcAft>
-                <a:spcPts val="0"/>
-              </a:spcAft>
-            </a:pPr>
-            <a:r>
-              <a:rPr sz="1100" i="1">
+              <a:t>grype</a:t>
+            </a:r>
+            <a:r>
+              <a:rPr sz="1400" dirty="0">
+                <a:solidFill>
+                  <a:srgbClr val="2D2D2D"/>
+                </a:solidFill>
+                <a:latin typeface="Consolas"/>
+              </a:rPr>
+              <a:t> </a:t>
+            </a:r>
+            <a:r>
+              <a:rPr sz="1400" dirty="0" err="1">
+                <a:solidFill>
+                  <a:srgbClr val="2D2D2D"/>
+                </a:solidFill>
+                <a:latin typeface="Consolas"/>
+              </a:rPr>
+              <a:t>sbom:core-image-base.spdx.json</a:t>
+            </a:r>
+            <a:endParaRPr sz="1400" dirty="0">
+              <a:solidFill>
+                <a:srgbClr val="2D2D2D"/>
+              </a:solidFill>
+              <a:latin typeface="Consolas"/>
+            </a:endParaRPr>
+          </a:p>
+          <a:p>
+            <a:pPr>
+              <a:spcAft>
+                <a:spcPts val="0"/>
+              </a:spcAft>
+            </a:pPr>
+            <a:r>
+              <a:rPr sz="1400" i="1" dirty="0">
                 <a:solidFill>
                   <a:srgbClr val="808080"/>
                 </a:solidFill>
                 <a:latin typeface="Consolas"/>
               </a:rPr>
-              <a:t># Will show CVEs against components — comparing to cve-check next</a:t>
-            </a:r>
-          </a:p>
-        </p:txBody>
-      </p:sp>
-    </p:spTree>
-  </p:cSld>
-  <p:clrMapOvr>
-    <a:masterClrMapping/>
-  </p:clrMapOvr>
-</p:sld>
-</file>
-
-<file path=ppt/slides/slide16.xml><?xml version="1.0" encoding="utf-8"?>
-<p:sld xmlns:a="http://schemas.openxmlformats.org/drawingml/2006/main" xmlns:p="http://schemas.openxmlformats.org/presentationml/2006/main" xmlns:r="http://schemas.openxmlformats.org/officeDocument/2006/relationships">
-  <p:cSld>
-    <p:spTree>
-      <p:nvGrpSpPr>
-        <p:cNvPr id="1" name=""/>
-        <p:cNvGrpSpPr/>
-        <p:nvPr/>
-      </p:nvGrpSpPr>
-      <p:grpSpPr/>
-      <p:sp>
-        <p:nvSpPr>
-          <p:cNvPr id="2" name="Title 1"/>
-          <p:cNvSpPr>
-            <a:spLocks noGrp="1"/>
-          </p:cNvSpPr>
-          <p:nvPr>
-            <p:ph type="title"/>
-          </p:nvPr>
-        </p:nvSpPr>
-        <p:spPr/>
-        <p:txBody>
-          <a:bodyPr/>
-          <a:lstStyle/>
-          <a:p>
-            <a:r>
-              <a:rPr sz="3200" b="1">
-                <a:solidFill>
-                  <a:srgbClr val="CC0066"/>
-                </a:solidFill>
-                <a:latin typeface="Calibri"/>
-              </a:rPr>
-              <a:t>What Auditors Ask For</a:t>
-            </a:r>
-          </a:p>
-        </p:txBody>
-      </p:sp>
-      <p:sp>
-        <p:nvSpPr>
-          <p:cNvPr id="3" name="TextBox 2"/>
-          <p:cNvSpPr txBox="1"/>
-          <p:nvPr/>
-        </p:nvSpPr>
-        <p:spPr>
-          <a:xfrm>
-            <a:off x="822960" y="1417320"/>
-            <a:ext cx="10515600" cy="365760"/>
-          </a:xfrm>
-          <a:prstGeom prst="rect">
-            <a:avLst/>
-          </a:prstGeom>
-          <a:noFill/>
-        </p:spPr>
-        <p:txBody>
-          <a:bodyPr wrap="square" anchor="t" lIns="45720" rIns="45720">
-            <a:spAutoFit/>
-          </a:bodyPr>
-          <a:lstStyle/>
-          <a:p>
-            <a:pPr algn="l"/>
-            <a:r>
-              <a:rPr sz="1500" b="0" i="1">
-                <a:solidFill>
-                  <a:srgbClr val="666666"/>
-                </a:solidFill>
-                <a:latin typeface="Calibri"/>
-              </a:rPr>
-              <a:t>Three documents that close most audits.</a:t>
-            </a:r>
-          </a:p>
-        </p:txBody>
-      </p:sp>
-      <p:sp>
-        <p:nvSpPr>
-          <p:cNvPr id="4" name="Rectangle 3"/>
-          <p:cNvSpPr/>
-          <p:nvPr/>
-        </p:nvSpPr>
-        <p:spPr>
-          <a:xfrm>
-            <a:off x="640080" y="1783080"/>
-            <a:ext cx="3520440" cy="640080"/>
-          </a:xfrm>
-          <a:prstGeom prst="rect">
-            <a:avLst/>
-          </a:prstGeom>
-          <a:solidFill>
-            <a:srgbClr val="CC0066"/>
-          </a:solidFill>
-          <a:ln>
-            <a:noFill/>
-          </a:ln>
-          <a:effectLst/>
-        </p:spPr>
-        <p:style>
-          <a:lnRef idx="1">
-            <a:schemeClr val="accent1"/>
-          </a:lnRef>
-          <a:fillRef idx="3">
-            <a:schemeClr val="accent1"/>
-          </a:fillRef>
-          <a:effectRef idx="2">
-            <a:schemeClr val="accent1"/>
-          </a:effectRef>
-          <a:fontRef idx="minor">
-            <a:schemeClr val="lt1"/>
-          </a:fontRef>
-        </p:style>
-        <p:txBody>
-          <a:bodyPr rtlCol="0" anchor="ctr" lIns="182880"/>
-          <a:lstStyle/>
-          <a:p>
-            <a:pPr algn="ctr"/>
-            <a:r>
-              <a:rPr sz="2000" b="1">
-                <a:solidFill>
-                  <a:srgbClr val="FFFFFF"/>
-                </a:solidFill>
-                <a:latin typeface="Calibri"/>
-              </a:rPr>
-              <a:t>License manifest</a:t>
-            </a:r>
-          </a:p>
-          <a:p>
-            <a:r>
-              <a:rPr sz="1200" i="1">
-                <a:solidFill>
-                  <a:srgbClr val="FFFFFF"/>
-                </a:solidFill>
-                <a:latin typeface="Calibri"/>
-              </a:rPr>
-              <a:t>All software, all licenses</a:t>
-            </a:r>
-          </a:p>
-        </p:txBody>
-      </p:sp>
-      <p:sp>
-        <p:nvSpPr>
-          <p:cNvPr id="5" name="Rectangle 4"/>
-          <p:cNvSpPr/>
-          <p:nvPr/>
-        </p:nvSpPr>
-        <p:spPr>
-          <a:xfrm>
-            <a:off x="640080" y="2423160"/>
-            <a:ext cx="3520440" cy="3657600"/>
-          </a:xfrm>
-          <a:prstGeom prst="rect">
-            <a:avLst/>
-          </a:prstGeom>
-          <a:solidFill>
-            <a:srgbClr val="FAFAFA"/>
-          </a:solidFill>
-          <a:ln w="6350">
-            <a:solidFill>
-              <a:srgbClr val="CC0066"/>
-            </a:solidFill>
-          </a:ln>
-          <a:effectLst/>
-        </p:spPr>
-        <p:style>
-          <a:lnRef idx="1">
-            <a:schemeClr val="accent1"/>
-          </a:lnRef>
-          <a:fillRef idx="3">
-            <a:schemeClr val="accent1"/>
-          </a:fillRef>
-          <a:effectRef idx="2">
-            <a:schemeClr val="accent1"/>
-          </a:effectRef>
-          <a:fontRef idx="minor">
-            <a:schemeClr val="lt1"/>
-          </a:fontRef>
-        </p:style>
-        <p:txBody>
-          <a:bodyPr rtlCol="0" anchor="ctr"/>
-          <a:lstStyle/>
-          <a:p>
-            <a:pPr algn="ctr"/>
-          </a:p>
-        </p:txBody>
-      </p:sp>
-      <p:sp>
-        <p:nvSpPr>
-          <p:cNvPr id="6" name="TextBox 5"/>
-          <p:cNvSpPr txBox="1"/>
-          <p:nvPr/>
-        </p:nvSpPr>
-        <p:spPr>
-          <a:xfrm>
-            <a:off x="731519" y="2514600"/>
-            <a:ext cx="3337560" cy="3474720"/>
-          </a:xfrm>
-          <a:prstGeom prst="rect">
-            <a:avLst/>
-          </a:prstGeom>
-          <a:noFill/>
-        </p:spPr>
-        <p:txBody>
-          <a:bodyPr wrap="square" lIns="45720" rIns="45720">
-            <a:spAutoFit/>
-          </a:bodyPr>
-          <a:lstStyle/>
-          <a:p>
-            <a:pPr>
-              <a:spcAft>
-                <a:spcPts val="400"/>
-              </a:spcAft>
-            </a:pPr>
-            <a:r>
-              <a:rPr sz="1200" b="1" i="0">
-                <a:solidFill>
-                  <a:srgbClr val="CC0066"/>
-                </a:solidFill>
-                <a:latin typeface="Calibri"/>
-              </a:rPr>
-              <a:t>What:</a:t>
-            </a:r>
-          </a:p>
-          <a:p>
-            <a:pPr>
-              <a:spcAft>
-                <a:spcPts val="400"/>
-              </a:spcAft>
-            </a:pPr>
-            <a:r>
-              <a:rPr sz="1100" b="0" i="0">
-                <a:solidFill>
-                  <a:srgbClr val="333333"/>
-                </a:solidFill>
-                <a:latin typeface="Calibri"/>
-              </a:rPr>
-              <a:t>Every package, its</a:t>
-            </a:r>
-          </a:p>
-          <a:p>
-            <a:pPr>
-              <a:spcAft>
-                <a:spcPts val="400"/>
-              </a:spcAft>
-            </a:pPr>
-            <a:r>
-              <a:rPr sz="1100" b="0" i="0">
-                <a:solidFill>
-                  <a:srgbClr val="333333"/>
-                </a:solidFill>
-                <a:latin typeface="Calibri"/>
-              </a:rPr>
-              <a:t>version, its license</a:t>
-            </a:r>
-          </a:p>
-          <a:p>
-            <a:pPr>
-              <a:spcAft>
-                <a:spcPts val="400"/>
-              </a:spcAft>
-            </a:pPr>
-            <a:r>
-              <a:rPr sz="1100" b="0" i="0">
-                <a:solidFill>
-                  <a:srgbClr val="333333"/>
-                </a:solidFill>
-                <a:latin typeface="Calibri"/>
-              </a:rPr>
-              <a:t/>
-            </a:r>
-          </a:p>
-          <a:p>
-            <a:pPr>
-              <a:spcAft>
-                <a:spcPts val="400"/>
-              </a:spcAft>
-            </a:pPr>
-            <a:r>
-              <a:rPr sz="1200" b="1" i="0">
-                <a:solidFill>
-                  <a:srgbClr val="CC0066"/>
-                </a:solidFill>
-                <a:latin typeface="Calibri"/>
-              </a:rPr>
-              <a:t>Yocto provides:</a:t>
-            </a:r>
-          </a:p>
-          <a:p>
-            <a:pPr>
-              <a:spcAft>
-                <a:spcPts val="400"/>
-              </a:spcAft>
-            </a:pPr>
-            <a:r>
-              <a:rPr sz="1100" b="0" i="0">
-                <a:solidFill>
-                  <a:srgbClr val="333333"/>
-                </a:solidFill>
-                <a:latin typeface="Calibri"/>
-              </a:rPr>
-              <a:t>tmp/deploy/licenses/</a:t>
-            </a:r>
-          </a:p>
-          <a:p>
-            <a:pPr>
-              <a:spcAft>
-                <a:spcPts val="400"/>
-              </a:spcAft>
-            </a:pPr>
-            <a:r>
-              <a:rPr sz="1100" b="0" i="0">
-                <a:solidFill>
-                  <a:srgbClr val="333333"/>
-                </a:solidFill>
-                <a:latin typeface="Calibri"/>
-              </a:rPr>
-              <a:t>&lt;image&gt;/license.manifest</a:t>
-            </a:r>
-          </a:p>
-          <a:p>
-            <a:pPr>
-              <a:spcAft>
-                <a:spcPts val="400"/>
-              </a:spcAft>
-            </a:pPr>
-            <a:r>
-              <a:rPr sz="1100" b="0" i="0">
-                <a:solidFill>
-                  <a:srgbClr val="333333"/>
-                </a:solidFill>
-                <a:latin typeface="Calibri"/>
-              </a:rPr>
-              <a:t/>
-            </a:r>
-          </a:p>
-          <a:p>
-            <a:pPr>
-              <a:spcAft>
-                <a:spcPts val="400"/>
-              </a:spcAft>
-            </a:pPr>
-            <a:r>
-              <a:rPr sz="1100" b="0" i="0">
-                <a:solidFill>
-                  <a:srgbClr val="333333"/>
-                </a:solidFill>
-                <a:latin typeface="Calibri"/>
-              </a:rPr>
-              <a:t>Hand it over</a:t>
-            </a:r>
-          </a:p>
-          <a:p>
-            <a:pPr>
-              <a:spcAft>
-                <a:spcPts val="400"/>
-              </a:spcAft>
-            </a:pPr>
-            <a:r>
-              <a:rPr sz="1100" b="0" i="0">
-                <a:solidFill>
-                  <a:srgbClr val="333333"/>
-                </a:solidFill>
-                <a:latin typeface="Calibri"/>
-              </a:rPr>
-              <a:t>as-is</a:t>
-            </a:r>
-          </a:p>
-        </p:txBody>
-      </p:sp>
-      <p:sp>
-        <p:nvSpPr>
-          <p:cNvPr id="7" name="Rectangle 6"/>
-          <p:cNvSpPr/>
-          <p:nvPr/>
-        </p:nvSpPr>
-        <p:spPr>
-          <a:xfrm>
-            <a:off x="4297680" y="1783080"/>
-            <a:ext cx="3520440" cy="640080"/>
-          </a:xfrm>
-          <a:prstGeom prst="rect">
-            <a:avLst/>
-          </a:prstGeom>
-          <a:solidFill>
-            <a:srgbClr val="663399"/>
-          </a:solidFill>
-          <a:ln>
-            <a:noFill/>
-          </a:ln>
-          <a:effectLst/>
-        </p:spPr>
-        <p:style>
-          <a:lnRef idx="1">
-            <a:schemeClr val="accent1"/>
-          </a:lnRef>
-          <a:fillRef idx="3">
-            <a:schemeClr val="accent1"/>
-          </a:fillRef>
-          <a:effectRef idx="2">
-            <a:schemeClr val="accent1"/>
-          </a:effectRef>
-          <a:fontRef idx="minor">
-            <a:schemeClr val="lt1"/>
-          </a:fontRef>
-        </p:style>
-        <p:txBody>
-          <a:bodyPr rtlCol="0" anchor="ctr" lIns="182880"/>
-          <a:lstStyle/>
-          <a:p>
-            <a:pPr algn="ctr"/>
-            <a:r>
-              <a:rPr sz="2000" b="1">
-                <a:solidFill>
-                  <a:srgbClr val="FFFFFF"/>
-                </a:solidFill>
-                <a:latin typeface="Calibri"/>
-              </a:rPr>
-              <a:t>SBOM (SPDX)</a:t>
-            </a:r>
-          </a:p>
-          <a:p>
-            <a:r>
-              <a:rPr sz="1200" i="1">
-                <a:solidFill>
-                  <a:srgbClr val="FFFFFF"/>
-                </a:solidFill>
-                <a:latin typeface="Calibri"/>
-              </a:rPr>
-              <a:t>Machine-readable BOM</a:t>
-            </a:r>
-          </a:p>
-        </p:txBody>
-      </p:sp>
-      <p:sp>
-        <p:nvSpPr>
-          <p:cNvPr id="8" name="Rectangle 7"/>
-          <p:cNvSpPr/>
-          <p:nvPr/>
-        </p:nvSpPr>
-        <p:spPr>
-          <a:xfrm>
-            <a:off x="4297680" y="2423160"/>
-            <a:ext cx="3520440" cy="3657600"/>
-          </a:xfrm>
-          <a:prstGeom prst="rect">
-            <a:avLst/>
-          </a:prstGeom>
-          <a:solidFill>
-            <a:srgbClr val="FAFAFA"/>
-          </a:solidFill>
-          <a:ln w="6350">
-            <a:solidFill>
-              <a:srgbClr val="663399"/>
-            </a:solidFill>
-          </a:ln>
-          <a:effectLst/>
-        </p:spPr>
-        <p:style>
-          <a:lnRef idx="1">
-            <a:schemeClr val="accent1"/>
-          </a:lnRef>
-          <a:fillRef idx="3">
-            <a:schemeClr val="accent1"/>
-          </a:fillRef>
-          <a:effectRef idx="2">
-            <a:schemeClr val="accent1"/>
-          </a:effectRef>
-          <a:fontRef idx="minor">
-            <a:schemeClr val="lt1"/>
-          </a:fontRef>
-        </p:style>
-        <p:txBody>
-          <a:bodyPr rtlCol="0" anchor="ctr"/>
-          <a:lstStyle/>
-          <a:p>
-            <a:pPr algn="ctr"/>
-          </a:p>
-        </p:txBody>
-      </p:sp>
-      <p:sp>
-        <p:nvSpPr>
-          <p:cNvPr id="9" name="TextBox 8"/>
-          <p:cNvSpPr txBox="1"/>
-          <p:nvPr/>
-        </p:nvSpPr>
-        <p:spPr>
-          <a:xfrm>
-            <a:off x="4389120" y="2514600"/>
-            <a:ext cx="3337560" cy="3474720"/>
-          </a:xfrm>
-          <a:prstGeom prst="rect">
-            <a:avLst/>
-          </a:prstGeom>
-          <a:noFill/>
-        </p:spPr>
-        <p:txBody>
-          <a:bodyPr wrap="square" lIns="45720" rIns="45720">
-            <a:spAutoFit/>
-          </a:bodyPr>
-          <a:lstStyle/>
-          <a:p>
-            <a:pPr>
-              <a:spcAft>
-                <a:spcPts val="400"/>
-              </a:spcAft>
-            </a:pPr>
-            <a:r>
-              <a:rPr sz="1200" b="1" i="0">
-                <a:solidFill>
-                  <a:srgbClr val="663399"/>
-                </a:solidFill>
-                <a:latin typeface="Calibri"/>
-              </a:rPr>
-              <a:t>What:</a:t>
-            </a:r>
-          </a:p>
-          <a:p>
-            <a:pPr>
-              <a:spcAft>
-                <a:spcPts val="400"/>
-              </a:spcAft>
-            </a:pPr>
-            <a:r>
-              <a:rPr sz="1100" b="0" i="0">
-                <a:solidFill>
-                  <a:srgbClr val="333333"/>
-                </a:solidFill>
-                <a:latin typeface="Calibri"/>
-              </a:rPr>
-              <a:t>Standardized package list,</a:t>
-            </a:r>
-          </a:p>
-          <a:p>
-            <a:pPr>
-              <a:spcAft>
-                <a:spcPts val="400"/>
-              </a:spcAft>
-            </a:pPr>
-            <a:r>
-              <a:rPr sz="1100" b="0" i="0">
-                <a:solidFill>
-                  <a:srgbClr val="333333"/>
-                </a:solidFill>
-                <a:latin typeface="Calibri"/>
-              </a:rPr>
-              <a:t>supplier, version, hash,</a:t>
-            </a:r>
-          </a:p>
-          <a:p>
-            <a:pPr>
-              <a:spcAft>
-                <a:spcPts val="400"/>
-              </a:spcAft>
-            </a:pPr>
-            <a:r>
-              <a:rPr sz="1100" b="0" i="0">
-                <a:solidFill>
-                  <a:srgbClr val="333333"/>
-                </a:solidFill>
-                <a:latin typeface="Calibri"/>
-              </a:rPr>
-              <a:t>relationships</a:t>
-            </a:r>
-          </a:p>
-          <a:p>
-            <a:pPr>
-              <a:spcAft>
-                <a:spcPts val="400"/>
-              </a:spcAft>
-            </a:pPr>
-            <a:r>
-              <a:rPr sz="1100" b="0" i="0">
-                <a:solidFill>
-                  <a:srgbClr val="333333"/>
-                </a:solidFill>
-                <a:latin typeface="Calibri"/>
-              </a:rPr>
-              <a:t/>
-            </a:r>
-          </a:p>
-          <a:p>
-            <a:pPr>
-              <a:spcAft>
-                <a:spcPts val="400"/>
-              </a:spcAft>
-            </a:pPr>
-            <a:r>
-              <a:rPr sz="1200" b="1" i="0">
-                <a:solidFill>
-                  <a:srgbClr val="663399"/>
-                </a:solidFill>
-                <a:latin typeface="Calibri"/>
-              </a:rPr>
-              <a:t>Yocto provides:</a:t>
-            </a:r>
-          </a:p>
-          <a:p>
-            <a:pPr>
-              <a:spcAft>
-                <a:spcPts val="400"/>
-              </a:spcAft>
-            </a:pPr>
-            <a:r>
-              <a:rPr sz="1100" b="0" i="0">
-                <a:solidFill>
-                  <a:srgbClr val="333333"/>
-                </a:solidFill>
-                <a:latin typeface="Calibri"/>
-              </a:rPr>
-              <a:t>tmp/deploy/spdx/</a:t>
-            </a:r>
-          </a:p>
-          <a:p>
-            <a:pPr>
-              <a:spcAft>
-                <a:spcPts val="400"/>
-              </a:spcAft>
-            </a:pPr>
-            <a:r>
-              <a:rPr sz="1100" b="0" i="0">
-                <a:solidFill>
-                  <a:srgbClr val="333333"/>
-                </a:solidFill>
-                <a:latin typeface="Calibri"/>
-              </a:rPr>
-              <a:t>(after INHERIT += create-spdx)</a:t>
-            </a:r>
-          </a:p>
-          <a:p>
-            <a:pPr>
-              <a:spcAft>
-                <a:spcPts val="400"/>
-              </a:spcAft>
-            </a:pPr>
-            <a:r>
-              <a:rPr sz="1100" b="0" i="0">
-                <a:solidFill>
-                  <a:srgbClr val="333333"/>
-                </a:solidFill>
-                <a:latin typeface="Calibri"/>
-              </a:rPr>
-              <a:t/>
-            </a:r>
-          </a:p>
-          <a:p>
-            <a:pPr>
-              <a:spcAft>
-                <a:spcPts val="400"/>
-              </a:spcAft>
-            </a:pPr>
-            <a:r>
-              <a:rPr sz="1100" b="0" i="0">
-                <a:solidFill>
-                  <a:srgbClr val="333333"/>
-                </a:solidFill>
-                <a:latin typeface="Calibri"/>
-              </a:rPr>
-              <a:t>Feeds into scanners</a:t>
-            </a:r>
-          </a:p>
-        </p:txBody>
-      </p:sp>
-      <p:sp>
-        <p:nvSpPr>
-          <p:cNvPr id="10" name="Rectangle 9"/>
-          <p:cNvSpPr/>
-          <p:nvPr/>
-        </p:nvSpPr>
-        <p:spPr>
-          <a:xfrm>
-            <a:off x="7955279" y="1783080"/>
-            <a:ext cx="3520440" cy="640080"/>
-          </a:xfrm>
-          <a:prstGeom prst="rect">
-            <a:avLst/>
-          </a:prstGeom>
-          <a:solidFill>
-            <a:srgbClr val="CC0066"/>
-          </a:solidFill>
-          <a:ln>
-            <a:noFill/>
-          </a:ln>
-          <a:effectLst/>
-        </p:spPr>
-        <p:style>
-          <a:lnRef idx="1">
-            <a:schemeClr val="accent1"/>
-          </a:lnRef>
-          <a:fillRef idx="3">
-            <a:schemeClr val="accent1"/>
-          </a:fillRef>
-          <a:effectRef idx="2">
-            <a:schemeClr val="accent1"/>
-          </a:effectRef>
-          <a:fontRef idx="minor">
-            <a:schemeClr val="lt1"/>
-          </a:fontRef>
-        </p:style>
-        <p:txBody>
-          <a:bodyPr rtlCol="0" anchor="ctr" lIns="182880"/>
-          <a:lstStyle/>
-          <a:p>
-            <a:pPr algn="ctr"/>
-            <a:r>
-              <a:rPr sz="2000" b="1">
-                <a:solidFill>
-                  <a:srgbClr val="FFFFFF"/>
-                </a:solidFill>
-                <a:latin typeface="Calibri"/>
-              </a:rPr>
-              <a:t>CVE report</a:t>
-            </a:r>
-          </a:p>
-          <a:p>
-            <a:r>
-              <a:rPr sz="1200" i="1">
-                <a:solidFill>
-                  <a:srgbClr val="FFFFFF"/>
-                </a:solidFill>
-                <a:latin typeface="Calibri"/>
-              </a:rPr>
-              <a:t>What's vulnerable now</a:t>
-            </a:r>
-          </a:p>
-        </p:txBody>
-      </p:sp>
-      <p:sp>
-        <p:nvSpPr>
-          <p:cNvPr id="11" name="Rectangle 10"/>
-          <p:cNvSpPr/>
-          <p:nvPr/>
-        </p:nvSpPr>
-        <p:spPr>
-          <a:xfrm>
-            <a:off x="7955279" y="2423160"/>
-            <a:ext cx="3520440" cy="3657600"/>
-          </a:xfrm>
-          <a:prstGeom prst="rect">
-            <a:avLst/>
-          </a:prstGeom>
-          <a:solidFill>
-            <a:srgbClr val="FAFAFA"/>
-          </a:solidFill>
-          <a:ln w="6350">
-            <a:solidFill>
-              <a:srgbClr val="CC0066"/>
-            </a:solidFill>
-          </a:ln>
-          <a:effectLst/>
-        </p:spPr>
-        <p:style>
-          <a:lnRef idx="1">
-            <a:schemeClr val="accent1"/>
-          </a:lnRef>
-          <a:fillRef idx="3">
-            <a:schemeClr val="accent1"/>
-          </a:fillRef>
-          <a:effectRef idx="2">
-            <a:schemeClr val="accent1"/>
-          </a:effectRef>
-          <a:fontRef idx="minor">
-            <a:schemeClr val="lt1"/>
-          </a:fontRef>
-        </p:style>
-        <p:txBody>
-          <a:bodyPr rtlCol="0" anchor="ctr"/>
-          <a:lstStyle/>
-          <a:p>
-            <a:pPr algn="ctr"/>
-          </a:p>
-        </p:txBody>
-      </p:sp>
-      <p:sp>
-        <p:nvSpPr>
-          <p:cNvPr id="12" name="TextBox 11"/>
-          <p:cNvSpPr txBox="1"/>
-          <p:nvPr/>
-        </p:nvSpPr>
-        <p:spPr>
-          <a:xfrm>
-            <a:off x="8046719" y="2514600"/>
-            <a:ext cx="3337560" cy="3474720"/>
-          </a:xfrm>
-          <a:prstGeom prst="rect">
-            <a:avLst/>
-          </a:prstGeom>
-          <a:noFill/>
-        </p:spPr>
-        <p:txBody>
-          <a:bodyPr wrap="square" lIns="45720" rIns="45720">
-            <a:spAutoFit/>
-          </a:bodyPr>
-          <a:lstStyle/>
-          <a:p>
-            <a:pPr>
-              <a:spcAft>
-                <a:spcPts val="400"/>
-              </a:spcAft>
-            </a:pPr>
-            <a:r>
-              <a:rPr sz="1200" b="1" i="0">
-                <a:solidFill>
-                  <a:srgbClr val="CC0066"/>
-                </a:solidFill>
-                <a:latin typeface="Calibri"/>
-              </a:rPr>
-              <a:t>What:</a:t>
-            </a:r>
-          </a:p>
-          <a:p>
-            <a:pPr>
-              <a:spcAft>
-                <a:spcPts val="400"/>
-              </a:spcAft>
-            </a:pPr>
-            <a:r>
-              <a:rPr sz="1100" b="0" i="0">
-                <a:solidFill>
-                  <a:srgbClr val="333333"/>
-                </a:solidFill>
-                <a:latin typeface="Calibri"/>
-              </a:rPr>
-              <a:t>Per-package CVE list,</a:t>
-            </a:r>
-          </a:p>
-          <a:p>
-            <a:pPr>
-              <a:spcAft>
-                <a:spcPts val="400"/>
-              </a:spcAft>
-            </a:pPr>
-            <a:r>
-              <a:rPr sz="1100" b="0" i="0">
-                <a:solidFill>
-                  <a:srgbClr val="333333"/>
-                </a:solidFill>
-                <a:latin typeface="Calibri"/>
-              </a:rPr>
-              <a:t>patched/unpatched,</a:t>
-            </a:r>
-          </a:p>
-          <a:p>
-            <a:pPr>
-              <a:spcAft>
-                <a:spcPts val="400"/>
-              </a:spcAft>
-            </a:pPr>
-            <a:r>
-              <a:rPr sz="1100" b="0" i="0">
-                <a:solidFill>
-                  <a:srgbClr val="333333"/>
-                </a:solidFill>
-                <a:latin typeface="Calibri"/>
-              </a:rPr>
-              <a:t>justifications</a:t>
-            </a:r>
-          </a:p>
-          <a:p>
-            <a:pPr>
-              <a:spcAft>
-                <a:spcPts val="400"/>
-              </a:spcAft>
-            </a:pPr>
-            <a:r>
-              <a:rPr sz="1100" b="0" i="0">
-                <a:solidFill>
-                  <a:srgbClr val="333333"/>
-                </a:solidFill>
-                <a:latin typeface="Calibri"/>
-              </a:rPr>
-              <a:t/>
-            </a:r>
-          </a:p>
-          <a:p>
-            <a:pPr>
-              <a:spcAft>
-                <a:spcPts val="400"/>
-              </a:spcAft>
-            </a:pPr>
-            <a:r>
-              <a:rPr sz="1200" b="1" i="0">
-                <a:solidFill>
-                  <a:srgbClr val="CC0066"/>
-                </a:solidFill>
-                <a:latin typeface="Calibri"/>
-              </a:rPr>
-              <a:t>Yocto provides:</a:t>
-            </a:r>
-          </a:p>
-          <a:p>
-            <a:pPr>
-              <a:spcAft>
-                <a:spcPts val="400"/>
-              </a:spcAft>
-            </a:pPr>
-            <a:r>
-              <a:rPr sz="1100" b="0" i="0">
-                <a:solidFill>
-                  <a:srgbClr val="333333"/>
-                </a:solidFill>
-                <a:latin typeface="Calibri"/>
-              </a:rPr>
-              <a:t>tmp/deploy/cve/</a:t>
-            </a:r>
-          </a:p>
-          <a:p>
-            <a:pPr>
-              <a:spcAft>
-                <a:spcPts val="400"/>
-              </a:spcAft>
-            </a:pPr>
-            <a:r>
-              <a:rPr sz="1100" b="0" i="0">
-                <a:solidFill>
-                  <a:srgbClr val="333333"/>
-                </a:solidFill>
-                <a:latin typeface="Calibri"/>
-              </a:rPr>
-              <a:t>(after INHERIT += cve-check)</a:t>
-            </a:r>
-          </a:p>
-          <a:p>
-            <a:pPr>
-              <a:spcAft>
-                <a:spcPts val="400"/>
-              </a:spcAft>
-            </a:pPr>
-            <a:r>
-              <a:rPr sz="1100" b="0" i="0">
-                <a:solidFill>
-                  <a:srgbClr val="333333"/>
-                </a:solidFill>
-                <a:latin typeface="Calibri"/>
-              </a:rPr>
-              <a:t/>
-            </a:r>
-          </a:p>
-          <a:p>
-            <a:pPr>
-              <a:spcAft>
-                <a:spcPts val="400"/>
-              </a:spcAft>
-            </a:pPr>
-            <a:r>
-              <a:rPr sz="1100" b="0" i="0">
-                <a:solidFill>
-                  <a:srgbClr val="333333"/>
-                </a:solidFill>
-                <a:latin typeface="Calibri"/>
-              </a:rPr>
-              <a:t>Next session covers this</a:t>
-            </a:r>
-          </a:p>
-        </p:txBody>
-      </p:sp>
-    </p:spTree>
-  </p:cSld>
-  <p:clrMapOvr>
-    <a:masterClrMapping/>
-  </p:clrMapOvr>
-</p:sld>
-</file>
-
-<file path=ppt/slides/slide17.xml><?xml version="1.0" encoding="utf-8"?>
-<p:sld xmlns:a="http://schemas.openxmlformats.org/drawingml/2006/main" xmlns:p="http://schemas.openxmlformats.org/presentationml/2006/main" xmlns:r="http://schemas.openxmlformats.org/officeDocument/2006/relationships">
-  <p:cSld>
-    <p:spTree>
-      <p:nvGrpSpPr>
-        <p:cNvPr id="1" name=""/>
-        <p:cNvGrpSpPr/>
-        <p:nvPr/>
-      </p:nvGrpSpPr>
-      <p:grpSpPr/>
-      <p:sp>
-        <p:nvSpPr>
-          <p:cNvPr id="2" name="Title 1"/>
-          <p:cNvSpPr>
-            <a:spLocks noGrp="1"/>
-          </p:cNvSpPr>
-          <p:nvPr>
-            <p:ph type="title"/>
-          </p:nvPr>
-        </p:nvSpPr>
-        <p:spPr/>
-        <p:txBody>
-          <a:bodyPr/>
-          <a:lstStyle/>
-          <a:p>
-            <a:r>
-              <a:rPr sz="3200" b="1">
-                <a:solidFill>
-                  <a:srgbClr val="663399"/>
-                </a:solidFill>
-                <a:latin typeface="Calibri"/>
-              </a:rPr>
-              <a:t>Session Summary</a:t>
-            </a:r>
-          </a:p>
-        </p:txBody>
-      </p:sp>
-      <p:sp>
-        <p:nvSpPr>
-          <p:cNvPr id="3" name="TextBox 2"/>
-          <p:cNvSpPr txBox="1"/>
-          <p:nvPr/>
-        </p:nvSpPr>
-        <p:spPr>
-          <a:xfrm>
-            <a:off x="822960" y="1417320"/>
-            <a:ext cx="10515600" cy="365760"/>
-          </a:xfrm>
-          <a:prstGeom prst="rect">
-            <a:avLst/>
-          </a:prstGeom>
-          <a:noFill/>
-        </p:spPr>
-        <p:txBody>
-          <a:bodyPr wrap="square" anchor="t" lIns="45720" rIns="45720">
-            <a:spAutoFit/>
-          </a:bodyPr>
-          <a:lstStyle/>
-          <a:p>
-            <a:pPr algn="l"/>
-            <a:r>
-              <a:rPr sz="1500" b="0" i="1">
-                <a:solidFill>
-                  <a:srgbClr val="666666"/>
-                </a:solidFill>
-                <a:latin typeface="Calibri"/>
-              </a:rPr>
-              <a:t>5 things to remember from this session.</a:t>
-            </a:r>
-          </a:p>
-        </p:txBody>
-      </p:sp>
-      <p:sp>
-        <p:nvSpPr>
-          <p:cNvPr id="4" name="Rounded Rectangle 3"/>
-          <p:cNvSpPr/>
-          <p:nvPr/>
-        </p:nvSpPr>
-        <p:spPr>
-          <a:xfrm>
-            <a:off x="822960" y="1874519"/>
-            <a:ext cx="457200" cy="548640"/>
-          </a:xfrm>
-          <a:prstGeom prst="roundRect">
-            <a:avLst/>
-          </a:prstGeom>
-          <a:solidFill>
-            <a:srgbClr val="CC0066"/>
-          </a:solidFill>
-          <a:ln>
-            <a:noFill/>
-          </a:ln>
-          <a:effectLst/>
-        </p:spPr>
-        <p:style>
-          <a:lnRef idx="1">
-            <a:schemeClr val="accent1"/>
-          </a:lnRef>
-          <a:fillRef idx="3">
-            <a:schemeClr val="accent1"/>
-          </a:fillRef>
-          <a:effectRef idx="2">
-            <a:schemeClr val="accent1"/>
-          </a:effectRef>
-          <a:fontRef idx="minor">
-            <a:schemeClr val="lt1"/>
-          </a:fontRef>
-        </p:style>
-        <p:txBody>
-          <a:bodyPr rtlCol="0" anchor="ctr" lIns="0" rIns="0"/>
-          <a:lstStyle/>
-          <a:p>
-            <a:pPr algn="ctr"/>
-            <a:r>
-              <a:rPr sz="2200" b="1">
-                <a:solidFill>
-                  <a:srgbClr val="FFFFFF"/>
-                </a:solidFill>
-                <a:latin typeface="Calibri"/>
-              </a:rPr>
-              <a:t>1</a:t>
-            </a:r>
-          </a:p>
-        </p:txBody>
-      </p:sp>
-      <p:sp>
-        <p:nvSpPr>
-          <p:cNvPr id="5" name="TextBox 4"/>
-          <p:cNvSpPr txBox="1"/>
-          <p:nvPr/>
-        </p:nvSpPr>
-        <p:spPr>
-          <a:xfrm>
-            <a:off x="1417320" y="1874519"/>
-            <a:ext cx="10058400" cy="320040"/>
-          </a:xfrm>
-          <a:prstGeom prst="rect">
-            <a:avLst/>
-          </a:prstGeom>
-          <a:noFill/>
-        </p:spPr>
-        <p:txBody>
-          <a:bodyPr wrap="square" anchor="t" lIns="45720" rIns="45720">
-            <a:spAutoFit/>
-          </a:bodyPr>
-          <a:lstStyle/>
-          <a:p>
-            <a:pPr algn="l"/>
-            <a:r>
-              <a:rPr sz="1600" b="1" i="0">
-                <a:solidFill>
-                  <a:srgbClr val="663399"/>
-                </a:solidFill>
-                <a:latin typeface="Calibri"/>
-              </a:rPr>
-              <a:t>Use SPDX identifiers in LICENSE</a:t>
-            </a:r>
-          </a:p>
-        </p:txBody>
-      </p:sp>
-      <p:sp>
-        <p:nvSpPr>
-          <p:cNvPr id="6" name="TextBox 5"/>
-          <p:cNvSpPr txBox="1"/>
-          <p:nvPr/>
-        </p:nvSpPr>
-        <p:spPr>
-          <a:xfrm>
-            <a:off x="1417320" y="2185415"/>
-            <a:ext cx="10058400" cy="320040"/>
-          </a:xfrm>
-          <a:prstGeom prst="rect">
-            <a:avLst/>
-          </a:prstGeom>
-          <a:noFill/>
-        </p:spPr>
-        <p:txBody>
-          <a:bodyPr wrap="square" anchor="t" lIns="45720" rIns="45720">
-            <a:spAutoFit/>
-          </a:bodyPr>
-          <a:lstStyle/>
-          <a:p>
-            <a:pPr algn="l"/>
-            <a:r>
-              <a:rPr sz="1300" b="0" i="0">
-                <a:solidFill>
-                  <a:srgbClr val="333333"/>
-                </a:solidFill>
-                <a:latin typeface="Calibri"/>
-              </a:rPr>
-              <a:t>Free-text 'GPL' is ambiguous; GPL-2.0-only is precise</a:t>
-            </a:r>
-          </a:p>
-        </p:txBody>
-      </p:sp>
-      <p:sp>
-        <p:nvSpPr>
-          <p:cNvPr id="7" name="Rounded Rectangle 6"/>
-          <p:cNvSpPr/>
-          <p:nvPr/>
-        </p:nvSpPr>
-        <p:spPr>
-          <a:xfrm>
-            <a:off x="822960" y="2587752"/>
-            <a:ext cx="457200" cy="548640"/>
-          </a:xfrm>
-          <a:prstGeom prst="roundRect">
-            <a:avLst/>
-          </a:prstGeom>
-          <a:solidFill>
-            <a:srgbClr val="CC0066"/>
-          </a:solidFill>
-          <a:ln>
-            <a:noFill/>
-          </a:ln>
-          <a:effectLst/>
-        </p:spPr>
-        <p:style>
-          <a:lnRef idx="1">
-            <a:schemeClr val="accent1"/>
-          </a:lnRef>
-          <a:fillRef idx="3">
-            <a:schemeClr val="accent1"/>
-          </a:fillRef>
-          <a:effectRef idx="2">
-            <a:schemeClr val="accent1"/>
-          </a:effectRef>
-          <a:fontRef idx="minor">
-            <a:schemeClr val="lt1"/>
-          </a:fontRef>
-        </p:style>
-        <p:txBody>
-          <a:bodyPr rtlCol="0" anchor="ctr" lIns="0" rIns="0"/>
-          <a:lstStyle/>
-          <a:p>
-            <a:pPr algn="ctr"/>
-            <a:r>
-              <a:rPr sz="2200" b="1">
-                <a:solidFill>
-                  <a:srgbClr val="FFFFFF"/>
-                </a:solidFill>
-                <a:latin typeface="Calibri"/>
-              </a:rPr>
-              <a:t>2</a:t>
-            </a:r>
-          </a:p>
-        </p:txBody>
-      </p:sp>
-      <p:sp>
-        <p:nvSpPr>
-          <p:cNvPr id="8" name="TextBox 7"/>
-          <p:cNvSpPr txBox="1"/>
-          <p:nvPr/>
-        </p:nvSpPr>
-        <p:spPr>
-          <a:xfrm>
-            <a:off x="1417320" y="2587752"/>
-            <a:ext cx="10058400" cy="320040"/>
-          </a:xfrm>
-          <a:prstGeom prst="rect">
-            <a:avLst/>
-          </a:prstGeom>
-          <a:noFill/>
-        </p:spPr>
-        <p:txBody>
-          <a:bodyPr wrap="square" anchor="t" lIns="45720" rIns="45720">
-            <a:spAutoFit/>
-          </a:bodyPr>
-          <a:lstStyle/>
-          <a:p>
-            <a:pPr algn="l"/>
-            <a:r>
-              <a:rPr sz="1600" b="1" i="0">
-                <a:solidFill>
-                  <a:srgbClr val="663399"/>
-                </a:solidFill>
-                <a:latin typeface="Calibri"/>
-              </a:rPr>
-              <a:t>LIC_FILES_CHKSUM catches upstream license changes</a:t>
-            </a:r>
-          </a:p>
-        </p:txBody>
-      </p:sp>
-      <p:sp>
-        <p:nvSpPr>
-          <p:cNvPr id="9" name="TextBox 8"/>
-          <p:cNvSpPr txBox="1"/>
-          <p:nvPr/>
-        </p:nvSpPr>
-        <p:spPr>
-          <a:xfrm>
-            <a:off x="1417320" y="2898648"/>
-            <a:ext cx="10058400" cy="320040"/>
-          </a:xfrm>
-          <a:prstGeom prst="rect">
-            <a:avLst/>
-          </a:prstGeom>
-          <a:noFill/>
-        </p:spPr>
-        <p:txBody>
-          <a:bodyPr wrap="square" anchor="t" lIns="45720" rIns="45720">
-            <a:spAutoFit/>
-          </a:bodyPr>
-          <a:lstStyle/>
-          <a:p>
-            <a:pPr algn="l"/>
-            <a:r>
-              <a:rPr sz="1300" b="0" i="0">
-                <a:solidFill>
-                  <a:srgbClr val="333333"/>
-                </a:solidFill>
-                <a:latin typeface="Calibri"/>
-              </a:rPr>
-              <a:t>Tamper-evident; required for every recipe</a:t>
-            </a:r>
-          </a:p>
-        </p:txBody>
-      </p:sp>
-      <p:sp>
-        <p:nvSpPr>
-          <p:cNvPr id="10" name="Rounded Rectangle 9"/>
-          <p:cNvSpPr/>
-          <p:nvPr/>
-        </p:nvSpPr>
-        <p:spPr>
-          <a:xfrm>
-            <a:off x="822960" y="3300984"/>
-            <a:ext cx="457200" cy="548640"/>
-          </a:xfrm>
-          <a:prstGeom prst="roundRect">
-            <a:avLst/>
-          </a:prstGeom>
-          <a:solidFill>
-            <a:srgbClr val="CC0066"/>
-          </a:solidFill>
-          <a:ln>
-            <a:noFill/>
-          </a:ln>
-          <a:effectLst/>
-        </p:spPr>
-        <p:style>
-          <a:lnRef idx="1">
-            <a:schemeClr val="accent1"/>
-          </a:lnRef>
-          <a:fillRef idx="3">
-            <a:schemeClr val="accent1"/>
-          </a:fillRef>
-          <a:effectRef idx="2">
-            <a:schemeClr val="accent1"/>
-          </a:effectRef>
-          <a:fontRef idx="minor">
-            <a:schemeClr val="lt1"/>
-          </a:fontRef>
-        </p:style>
-        <p:txBody>
-          <a:bodyPr rtlCol="0" anchor="ctr" lIns="0" rIns="0"/>
-          <a:lstStyle/>
-          <a:p>
-            <a:pPr algn="ctr"/>
-            <a:r>
-              <a:rPr sz="2200" b="1">
-                <a:solidFill>
-                  <a:srgbClr val="FFFFFF"/>
-                </a:solidFill>
-                <a:latin typeface="Calibri"/>
-              </a:rPr>
-              <a:t>3</a:t>
-            </a:r>
-          </a:p>
-        </p:txBody>
-      </p:sp>
-      <p:sp>
-        <p:nvSpPr>
-          <p:cNvPr id="11" name="TextBox 10"/>
-          <p:cNvSpPr txBox="1"/>
-          <p:nvPr/>
-        </p:nvSpPr>
-        <p:spPr>
-          <a:xfrm>
-            <a:off x="1417320" y="3300984"/>
-            <a:ext cx="10058400" cy="320040"/>
-          </a:xfrm>
-          <a:prstGeom prst="rect">
-            <a:avLst/>
-          </a:prstGeom>
-          <a:noFill/>
-        </p:spPr>
-        <p:txBody>
-          <a:bodyPr wrap="square" anchor="t" lIns="45720" rIns="45720">
-            <a:spAutoFit/>
-          </a:bodyPr>
-          <a:lstStyle/>
-          <a:p>
-            <a:pPr algn="l"/>
-            <a:r>
-              <a:rPr sz="1600" b="1" i="0">
-                <a:solidFill>
-                  <a:srgbClr val="663399"/>
-                </a:solidFill>
-                <a:latin typeface="Calibri"/>
-              </a:rPr>
-              <a:t>INCOMPATIBLE_LICENSE enforces policy</a:t>
-            </a:r>
-          </a:p>
-        </p:txBody>
-      </p:sp>
-      <p:sp>
-        <p:nvSpPr>
-          <p:cNvPr id="12" name="TextBox 11"/>
-          <p:cNvSpPr txBox="1"/>
-          <p:nvPr/>
-        </p:nvSpPr>
-        <p:spPr>
-          <a:xfrm>
-            <a:off x="1417320" y="3611879"/>
-            <a:ext cx="10058400" cy="320040"/>
-          </a:xfrm>
-          <a:prstGeom prst="rect">
-            <a:avLst/>
-          </a:prstGeom>
-          <a:noFill/>
-        </p:spPr>
-        <p:txBody>
-          <a:bodyPr wrap="square" anchor="t" lIns="45720" rIns="45720">
-            <a:spAutoFit/>
-          </a:bodyPr>
-          <a:lstStyle/>
-          <a:p>
-            <a:pPr algn="l"/>
-            <a:r>
-              <a:rPr sz="1300" b="0" i="0">
-                <a:solidFill>
-                  <a:srgbClr val="333333"/>
-                </a:solidFill>
-                <a:latin typeface="Calibri"/>
-              </a:rPr>
-              <a:t>Most embedded products exclude GPL-3 due to anti-Tivoization</a:t>
-            </a:r>
-          </a:p>
-        </p:txBody>
-      </p:sp>
-      <p:sp>
-        <p:nvSpPr>
-          <p:cNvPr id="13" name="Rounded Rectangle 12"/>
-          <p:cNvSpPr/>
-          <p:nvPr/>
-        </p:nvSpPr>
-        <p:spPr>
-          <a:xfrm>
-            <a:off x="822960" y="4014215"/>
-            <a:ext cx="457200" cy="548640"/>
-          </a:xfrm>
-          <a:prstGeom prst="roundRect">
-            <a:avLst/>
-          </a:prstGeom>
-          <a:solidFill>
-            <a:srgbClr val="CC0066"/>
-          </a:solidFill>
-          <a:ln>
-            <a:noFill/>
-          </a:ln>
-          <a:effectLst/>
-        </p:spPr>
-        <p:style>
-          <a:lnRef idx="1">
-            <a:schemeClr val="accent1"/>
-          </a:lnRef>
-          <a:fillRef idx="3">
-            <a:schemeClr val="accent1"/>
-          </a:fillRef>
-          <a:effectRef idx="2">
-            <a:schemeClr val="accent1"/>
-          </a:effectRef>
-          <a:fontRef idx="minor">
-            <a:schemeClr val="lt1"/>
-          </a:fontRef>
-        </p:style>
-        <p:txBody>
-          <a:bodyPr rtlCol="0" anchor="ctr" lIns="0" rIns="0"/>
-          <a:lstStyle/>
-          <a:p>
-            <a:pPr algn="ctr"/>
-            <a:r>
-              <a:rPr sz="2200" b="1">
-                <a:solidFill>
-                  <a:srgbClr val="FFFFFF"/>
-                </a:solidFill>
-                <a:latin typeface="Calibri"/>
-              </a:rPr>
-              <a:t>4</a:t>
-            </a:r>
-          </a:p>
-        </p:txBody>
-      </p:sp>
-      <p:sp>
-        <p:nvSpPr>
-          <p:cNvPr id="14" name="TextBox 13"/>
-          <p:cNvSpPr txBox="1"/>
-          <p:nvPr/>
-        </p:nvSpPr>
-        <p:spPr>
-          <a:xfrm>
-            <a:off x="1417320" y="4014215"/>
-            <a:ext cx="10058400" cy="320040"/>
-          </a:xfrm>
-          <a:prstGeom prst="rect">
-            <a:avLst/>
-          </a:prstGeom>
-          <a:noFill/>
-        </p:spPr>
-        <p:txBody>
-          <a:bodyPr wrap="square" anchor="t" lIns="45720" rIns="45720">
-            <a:spAutoFit/>
-          </a:bodyPr>
-          <a:lstStyle/>
-          <a:p>
-            <a:pPr algn="l"/>
-            <a:r>
-              <a:rPr sz="1600" b="1" i="0">
-                <a:solidFill>
-                  <a:srgbClr val="663399"/>
-                </a:solidFill>
-                <a:latin typeface="Calibri"/>
-              </a:rPr>
-              <a:t>License manifests are auto-generated</a:t>
-            </a:r>
-          </a:p>
-        </p:txBody>
-      </p:sp>
-      <p:sp>
-        <p:nvSpPr>
-          <p:cNvPr id="15" name="TextBox 14"/>
-          <p:cNvSpPr txBox="1"/>
-          <p:nvPr/>
-        </p:nvSpPr>
-        <p:spPr>
-          <a:xfrm>
-            <a:off x="1417320" y="4325112"/>
-            <a:ext cx="10058400" cy="320040"/>
-          </a:xfrm>
-          <a:prstGeom prst="rect">
-            <a:avLst/>
-          </a:prstGeom>
-          <a:noFill/>
-        </p:spPr>
-        <p:txBody>
-          <a:bodyPr wrap="square" anchor="t" lIns="45720" rIns="45720">
-            <a:spAutoFit/>
-          </a:bodyPr>
-          <a:lstStyle/>
-          <a:p>
-            <a:pPr algn="l"/>
-            <a:r>
-              <a:rPr sz="1300" b="0" i="0">
-                <a:solidFill>
-                  <a:srgbClr val="333333"/>
-                </a:solidFill>
-                <a:latin typeface="Calibri"/>
-              </a:rPr>
-              <a:t>tmp/deploy/licenses/ — ship to auditors as-is</a:t>
-            </a:r>
-          </a:p>
-        </p:txBody>
-      </p:sp>
-      <p:sp>
-        <p:nvSpPr>
-          <p:cNvPr id="16" name="Rounded Rectangle 15"/>
-          <p:cNvSpPr/>
-          <p:nvPr/>
-        </p:nvSpPr>
-        <p:spPr>
-          <a:xfrm>
-            <a:off x="822960" y="4727448"/>
-            <a:ext cx="457200" cy="548640"/>
-          </a:xfrm>
-          <a:prstGeom prst="roundRect">
-            <a:avLst/>
-          </a:prstGeom>
-          <a:solidFill>
-            <a:srgbClr val="CC0066"/>
-          </a:solidFill>
-          <a:ln>
-            <a:noFill/>
-          </a:ln>
-          <a:effectLst/>
-        </p:spPr>
-        <p:style>
-          <a:lnRef idx="1">
-            <a:schemeClr val="accent1"/>
-          </a:lnRef>
-          <a:fillRef idx="3">
-            <a:schemeClr val="accent1"/>
-          </a:fillRef>
-          <a:effectRef idx="2">
-            <a:schemeClr val="accent1"/>
-          </a:effectRef>
-          <a:fontRef idx="minor">
-            <a:schemeClr val="lt1"/>
-          </a:fontRef>
-        </p:style>
-        <p:txBody>
-          <a:bodyPr rtlCol="0" anchor="ctr" lIns="0" rIns="0"/>
-          <a:lstStyle/>
-          <a:p>
-            <a:pPr algn="ctr"/>
-            <a:r>
-              <a:rPr sz="2200" b="1">
-                <a:solidFill>
-                  <a:srgbClr val="FFFFFF"/>
-                </a:solidFill>
-                <a:latin typeface="Calibri"/>
-              </a:rPr>
-              <a:t>5</a:t>
-            </a:r>
-          </a:p>
-        </p:txBody>
-      </p:sp>
-      <p:sp>
-        <p:nvSpPr>
-          <p:cNvPr id="17" name="TextBox 16"/>
-          <p:cNvSpPr txBox="1"/>
-          <p:nvPr/>
-        </p:nvSpPr>
-        <p:spPr>
-          <a:xfrm>
-            <a:off x="1417320" y="4727448"/>
-            <a:ext cx="10058400" cy="320040"/>
-          </a:xfrm>
-          <a:prstGeom prst="rect">
-            <a:avLst/>
-          </a:prstGeom>
-          <a:noFill/>
-        </p:spPr>
-        <p:txBody>
-          <a:bodyPr wrap="square" anchor="t" lIns="45720" rIns="45720">
-            <a:spAutoFit/>
-          </a:bodyPr>
-          <a:lstStyle/>
-          <a:p>
-            <a:pPr algn="l"/>
-            <a:r>
-              <a:rPr sz="1600" b="1" i="0">
-                <a:solidFill>
-                  <a:srgbClr val="663399"/>
-                </a:solidFill>
-                <a:latin typeface="Calibri"/>
-              </a:rPr>
-              <a:t>create-spdx generates SBOM at build time</a:t>
-            </a:r>
-          </a:p>
-        </p:txBody>
-      </p:sp>
-      <p:sp>
-        <p:nvSpPr>
-          <p:cNvPr id="18" name="TextBox 17"/>
-          <p:cNvSpPr txBox="1"/>
-          <p:nvPr/>
-        </p:nvSpPr>
-        <p:spPr>
-          <a:xfrm>
-            <a:off x="1417320" y="5038344"/>
-            <a:ext cx="10058400" cy="320040"/>
-          </a:xfrm>
-          <a:prstGeom prst="rect">
-            <a:avLst/>
-          </a:prstGeom>
-          <a:noFill/>
-        </p:spPr>
-        <p:txBody>
-          <a:bodyPr wrap="square" anchor="t" lIns="45720" rIns="45720">
-            <a:spAutoFit/>
-          </a:bodyPr>
-          <a:lstStyle/>
-          <a:p>
-            <a:pPr algn="l"/>
-            <a:r>
-              <a:rPr sz="1300" b="0" i="0">
-                <a:solidFill>
-                  <a:srgbClr val="333333"/>
-                </a:solidFill>
-                <a:latin typeface="Calibri"/>
-              </a:rPr>
-              <a:t>One INHERIT line; required for EU CRA, US EO 14028, many enterprise customers</a:t>
-            </a:r>
-          </a:p>
-        </p:txBody>
-      </p:sp>
-      <p:sp>
-        <p:nvSpPr>
-          <p:cNvPr id="19" name="Rounded Rectangle 18"/>
-          <p:cNvSpPr/>
-          <p:nvPr/>
-        </p:nvSpPr>
-        <p:spPr>
-          <a:xfrm>
-            <a:off x="822960" y="5669280"/>
-            <a:ext cx="10561320" cy="640080"/>
-          </a:xfrm>
-          <a:prstGeom prst="roundRect">
-            <a:avLst/>
-          </a:prstGeom>
-          <a:solidFill>
-            <a:srgbClr val="FBE6F0"/>
-          </a:solidFill>
-          <a:ln>
-            <a:noFill/>
-          </a:ln>
-          <a:effectLst/>
-        </p:spPr>
-        <p:style>
-          <a:lnRef idx="1">
-            <a:schemeClr val="accent1"/>
-          </a:lnRef>
-          <a:fillRef idx="3">
-            <a:schemeClr val="accent1"/>
-          </a:fillRef>
-          <a:effectRef idx="2">
-            <a:schemeClr val="accent1"/>
-          </a:effectRef>
-          <a:fontRef idx="minor">
-            <a:schemeClr val="lt1"/>
-          </a:fontRef>
-        </p:style>
-        <p:txBody>
-          <a:bodyPr rtlCol="0" anchor="ctr" lIns="228600"/>
-          <a:lstStyle/>
-          <a:p>
-            <a:pPr algn="ctr"/>
-            <a:r>
-              <a:rPr sz="1400" b="1">
-                <a:solidFill>
-                  <a:srgbClr val="663399"/>
-                </a:solidFill>
-                <a:latin typeface="Calibri"/>
-              </a:rPr>
-              <a:t>Next session  →  </a:t>
-            </a:r>
-            <a:r>
-              <a:rPr sz="1400">
-                <a:solidFill>
-                  <a:srgbClr val="333333"/>
-                </a:solidFill>
-                <a:latin typeface="Calibri"/>
-              </a:rPr>
-              <a:t>CVE Triage (30 min)</a:t>
-            </a:r>
-          </a:p>
-        </p:txBody>
-      </p:sp>
-    </p:spTree>
-  </p:cSld>
-  <p:clrMapOvr>
-    <a:masterClrMapping/>
-  </p:clrMapOvr>
-</p:sld>
-</file>
-
-<file path=ppt/slides/slide7.xml><?xml version="1.0" encoding="utf-8"?>
-<p:sld xmlns:a="http://schemas.openxmlformats.org/drawingml/2006/main" xmlns:p="http://schemas.openxmlformats.org/presentationml/2006/main" xmlns:r="http://schemas.openxmlformats.org/officeDocument/2006/relationships">
-  <p:cSld>
-    <p:spTree>
-      <p:nvGrpSpPr>
-        <p:cNvPr id="1" name=""/>
-        <p:cNvGrpSpPr/>
-        <p:nvPr/>
-      </p:nvGrpSpPr>
-      <p:grpSpPr/>
-      <p:sp>
-        <p:nvSpPr>
-          <p:cNvPr id="2" name="Title 1"/>
-          <p:cNvSpPr>
-            <a:spLocks noGrp="1"/>
-          </p:cNvSpPr>
-          <p:nvPr>
-            <p:ph type="ctrTitle"/>
-          </p:nvPr>
-        </p:nvSpPr>
-        <p:spPr/>
-        <p:txBody>
-          <a:bodyPr/>
-          <a:lstStyle/>
-          <a:p>
-            <a:r>
-              <a:rPr sz="4400" b="1">
-                <a:solidFill>
-                  <a:srgbClr val="FFFFFF"/>
-                </a:solidFill>
-                <a:latin typeface="Calibri"/>
-              </a:rPr>
-              <a:t>License Compliance &amp; SBOM</a:t>
-            </a:r>
-          </a:p>
-        </p:txBody>
-      </p:sp>
-      <p:sp>
-        <p:nvSpPr>
-          <p:cNvPr id="3" name="Subtitle 2"/>
-          <p:cNvSpPr>
-            <a:spLocks noGrp="1"/>
-          </p:cNvSpPr>
-          <p:nvPr>
-            <p:ph type="subTitle" idx="1"/>
-          </p:nvPr>
-        </p:nvSpPr>
-        <p:spPr/>
-        <p:txBody>
-          <a:bodyPr/>
-          <a:lstStyle/>
-          <a:p>
-            <a:r>
-              <a:rPr sz="2200" i="1">
-                <a:solidFill>
-                  <a:srgbClr val="FFFFFF"/>
-                </a:solidFill>
-                <a:latin typeface="Calibri"/>
-              </a:rPr>
-              <a:t>Day 3 • Session 7 • 60 minutes</a:t>
-            </a:r>
-          </a:p>
-          <a:p>
-            <a:r>
-              <a:rPr sz="1800">
-                <a:solidFill>
-                  <a:srgbClr val="FFFFFF"/>
-                </a:solidFill>
-                <a:latin typeface="Calibri"/>
-              </a:rPr>
-              <a:t>SPDX, license manifests, audits</a:t>
-            </a:r>
-          </a:p>
-        </p:txBody>
-      </p:sp>
-    </p:spTree>
-  </p:cSld>
-  <p:clrMapOvr>
-    <a:masterClrMapping/>
-  </p:clrMapOvr>
-</p:sld>
-</file>
-
-<file path=ppt/slides/slide8.xml><?xml version="1.0" encoding="utf-8"?>
-<p:sld xmlns:a="http://schemas.openxmlformats.org/drawingml/2006/main" xmlns:p="http://schemas.openxmlformats.org/presentationml/2006/main" xmlns:r="http://schemas.openxmlformats.org/officeDocument/2006/relationships">
-  <p:cSld>
-    <p:spTree>
-      <p:nvGrpSpPr>
-        <p:cNvPr id="1" name=""/>
-        <p:cNvGrpSpPr/>
-        <p:nvPr/>
-      </p:nvGrpSpPr>
-      <p:grpSpPr/>
-      <p:sp>
-        <p:nvSpPr>
-          <p:cNvPr id="2" name="Title 1"/>
-          <p:cNvSpPr>
-            <a:spLocks noGrp="1"/>
-          </p:cNvSpPr>
-          <p:nvPr>
-            <p:ph type="title"/>
-          </p:nvPr>
-        </p:nvSpPr>
-        <p:spPr/>
-        <p:txBody>
-          <a:bodyPr/>
-          <a:lstStyle/>
-          <a:p>
-            <a:r>
-              <a:rPr sz="3200" b="1">
-                <a:solidFill>
-                  <a:srgbClr val="CC0066"/>
-                </a:solidFill>
-                <a:latin typeface="Calibri"/>
-              </a:rPr>
-              <a:t>Session Agenda</a:t>
-            </a:r>
-          </a:p>
-        </p:txBody>
-      </p:sp>
-      <p:sp>
-        <p:nvSpPr>
-          <p:cNvPr id="3" name="TextBox 2"/>
-          <p:cNvSpPr txBox="1"/>
-          <p:nvPr/>
-        </p:nvSpPr>
-        <p:spPr>
-          <a:xfrm>
-            <a:off x="822960" y="1463040"/>
-            <a:ext cx="10515600" cy="5029200"/>
-          </a:xfrm>
-          <a:prstGeom prst="rect">
-            <a:avLst/>
-          </a:prstGeom>
-          <a:noFill/>
-        </p:spPr>
-        <p:txBody>
-          <a:bodyPr wrap="square" lIns="45720" rIns="45720">
-            <a:spAutoFit/>
-          </a:bodyPr>
-          <a:lstStyle/>
-          <a:p>
-            <a:pPr>
-              <a:spcAft>
-                <a:spcPts val="600"/>
-              </a:spcAft>
-            </a:pPr>
-            <a:r>
-              <a:rPr sz="2000" b="0" i="0">
-                <a:solidFill>
-                  <a:srgbClr val="333333"/>
-                </a:solidFill>
-                <a:latin typeface="Calibri"/>
-              </a:rPr>
-              <a:t>1.  Why license compliance matters now</a:t>
-            </a:r>
-          </a:p>
-          <a:p>
-            <a:pPr>
-              <a:spcAft>
-                <a:spcPts val="600"/>
-              </a:spcAft>
-            </a:pPr>
-            <a:r>
-              <a:rPr sz="2000" b="0" i="0">
-                <a:solidFill>
-                  <a:srgbClr val="333333"/>
-                </a:solidFill>
-                <a:latin typeface="Calibri"/>
-              </a:rPr>
-              <a:t>2.  SPDX identifiers in recipes</a:t>
-            </a:r>
-          </a:p>
-          <a:p>
-            <a:pPr>
-              <a:spcAft>
-                <a:spcPts val="600"/>
-              </a:spcAft>
-            </a:pPr>
-            <a:r>
-              <a:rPr sz="2000" b="0" i="0">
-                <a:solidFill>
-                  <a:srgbClr val="333333"/>
-                </a:solidFill>
-                <a:latin typeface="Calibri"/>
-              </a:rPr>
-              <a:t>3.  LICENSE and LIC_FILES_CHKSUM</a:t>
-            </a:r>
-          </a:p>
-          <a:p>
-            <a:pPr>
-              <a:spcAft>
-                <a:spcPts val="600"/>
-              </a:spcAft>
-            </a:pPr>
-            <a:r>
-              <a:rPr sz="2000" b="0" i="0">
-                <a:solidFill>
-                  <a:srgbClr val="333333"/>
-                </a:solidFill>
-                <a:latin typeface="Calibri"/>
-              </a:rPr>
-              <a:t>4.  INCOMPATIBLE_LICENSE — policy enforcement</a:t>
-            </a:r>
-          </a:p>
-          <a:p>
-            <a:pPr>
-              <a:spcAft>
-                <a:spcPts val="600"/>
-              </a:spcAft>
-            </a:pPr>
-            <a:r>
-              <a:rPr sz="2000" b="0" i="0">
-                <a:solidFill>
-                  <a:srgbClr val="333333"/>
-                </a:solidFill>
-                <a:latin typeface="Calibri"/>
-              </a:rPr>
-              <a:t>5.  License manifests and audit reports</a:t>
-            </a:r>
-          </a:p>
-          <a:p>
-            <a:pPr>
-              <a:spcAft>
-                <a:spcPts val="600"/>
-              </a:spcAft>
-            </a:pPr>
-            <a:r>
-              <a:rPr sz="2000" b="0" i="0">
-                <a:solidFill>
-                  <a:srgbClr val="333333"/>
-                </a:solidFill>
-                <a:latin typeface="Calibri"/>
-              </a:rPr>
-              <a:t>6.  Third-party layer assessment</a:t>
-            </a:r>
-          </a:p>
-          <a:p>
-            <a:pPr>
-              <a:spcAft>
-                <a:spcPts val="600"/>
-              </a:spcAft>
-            </a:pPr>
-            <a:r>
-              <a:rPr sz="2000" b="0" i="0">
-                <a:solidFill>
-                  <a:srgbClr val="333333"/>
-                </a:solidFill>
-                <a:latin typeface="Calibri"/>
-              </a:rPr>
-              <a:t>7.  SBOM generation with create-spdx</a:t>
-            </a:r>
-          </a:p>
-          <a:p>
-            <a:pPr>
-              <a:spcAft>
-                <a:spcPts val="600"/>
-              </a:spcAft>
-            </a:pPr>
-            <a:r>
-              <a:rPr sz="2000" b="0" i="0">
-                <a:solidFill>
-                  <a:srgbClr val="333333"/>
-                </a:solidFill>
-                <a:latin typeface="Calibri"/>
-              </a:rPr>
-              <a:t>8.  What auditors actually ask for</a:t>
-            </a:r>
-          </a:p>
-        </p:txBody>
-      </p:sp>
-    </p:spTree>
-  </p:cSld>
-  <p:clrMapOvr>
-    <a:masterClrMapping/>
-  </p:clrMapOvr>
-</p:sld>
-</file>
-
-<file path=ppt/slides/slide9.xml><?xml version="1.0" encoding="utf-8"?>
-<p:sld xmlns:a="http://schemas.openxmlformats.org/drawingml/2006/main" xmlns:p="http://schemas.openxmlformats.org/presentationml/2006/main" xmlns:r="http://schemas.openxmlformats.org/officeDocument/2006/relationships">
-  <p:cSld>
-    <p:spTree>
-      <p:nvGrpSpPr>
-        <p:cNvPr id="1" name=""/>
-        <p:cNvGrpSpPr/>
-        <p:nvPr/>
-      </p:nvGrpSpPr>
-      <p:grpSpPr/>
-      <p:sp>
-        <p:nvSpPr>
-          <p:cNvPr id="2" name="Title 1"/>
-          <p:cNvSpPr>
-            <a:spLocks noGrp="1"/>
-          </p:cNvSpPr>
-          <p:nvPr>
-            <p:ph type="title"/>
-          </p:nvPr>
-        </p:nvSpPr>
-        <p:spPr/>
-        <p:txBody>
-          <a:bodyPr/>
-          <a:lstStyle/>
-          <a:p>
-            <a:r>
-              <a:rPr sz="3200" b="1">
-                <a:solidFill>
-                  <a:srgbClr val="CC0066"/>
-                </a:solidFill>
-                <a:latin typeface="Calibri"/>
-              </a:rPr>
-              <a:t>Why License Compliance Now</a:t>
-            </a:r>
-          </a:p>
-        </p:txBody>
-      </p:sp>
-      <p:sp>
-        <p:nvSpPr>
-          <p:cNvPr id="3" name="TextBox 2"/>
-          <p:cNvSpPr txBox="1"/>
-          <p:nvPr/>
-        </p:nvSpPr>
-        <p:spPr>
-          <a:xfrm>
-            <a:off x="822960" y="1417320"/>
-            <a:ext cx="10515600" cy="365760"/>
-          </a:xfrm>
-          <a:prstGeom prst="rect">
-            <a:avLst/>
-          </a:prstGeom>
-          <a:noFill/>
-        </p:spPr>
-        <p:txBody>
-          <a:bodyPr wrap="square" anchor="t" lIns="45720" rIns="45720">
-            <a:spAutoFit/>
-          </a:bodyPr>
-          <a:lstStyle/>
-          <a:p>
-            <a:pPr algn="l"/>
-            <a:r>
-              <a:rPr sz="1500" b="0" i="1">
-                <a:solidFill>
-                  <a:srgbClr val="666666"/>
-                </a:solidFill>
-                <a:latin typeface="Calibri"/>
-              </a:rPr>
-              <a:t>What changed in the last few years.</a:t>
-            </a:r>
-          </a:p>
-        </p:txBody>
-      </p:sp>
-      <p:sp>
-        <p:nvSpPr>
-          <p:cNvPr id="4" name="TextBox 3"/>
-          <p:cNvSpPr txBox="1"/>
-          <p:nvPr/>
-        </p:nvSpPr>
-        <p:spPr>
-          <a:xfrm>
-            <a:off x="822960" y="1783080"/>
-            <a:ext cx="10515600" cy="4572000"/>
-          </a:xfrm>
-          <a:prstGeom prst="rect">
-            <a:avLst/>
-          </a:prstGeom>
-          <a:noFill/>
-        </p:spPr>
-        <p:txBody>
-          <a:bodyPr wrap="square" lIns="45720" rIns="45720">
-            <a:spAutoFit/>
-          </a:bodyPr>
-          <a:lstStyle/>
-          <a:p>
-            <a:pPr>
-              <a:spcAft>
-                <a:spcPts val="400"/>
-              </a:spcAft>
-            </a:pPr>
-            <a:r>
-              <a:rPr sz="1600" b="1" i="0">
-                <a:solidFill>
-                  <a:srgbClr val="CC0066"/>
-                </a:solidFill>
-                <a:latin typeface="Calibri"/>
-              </a:rPr>
-              <a:t>Regulatory pressure</a:t>
-            </a:r>
-          </a:p>
-          <a:p>
-            <a:pPr>
-              <a:spcAft>
-                <a:spcPts val="400"/>
-              </a:spcAft>
-            </a:pPr>
-            <a:r>
-              <a:rPr sz="1300" b="0" i="0">
-                <a:solidFill>
-                  <a:srgbClr val="333333"/>
-                </a:solidFill>
-                <a:latin typeface="Calibri"/>
-              </a:rPr>
-              <a:t>• US Executive Order 14028 — SBOM for federal procurement</a:t>
-            </a:r>
-          </a:p>
-          <a:p>
-            <a:pPr>
-              <a:spcAft>
-                <a:spcPts val="400"/>
-              </a:spcAft>
-            </a:pPr>
-            <a:r>
-              <a:rPr sz="1300" b="0" i="0">
-                <a:solidFill>
-                  <a:srgbClr val="333333"/>
-                </a:solidFill>
-                <a:latin typeface="Calibri"/>
-              </a:rPr>
-              <a:t>• EU Cyber Resilience Act (CRA) — SBOM required for connected products</a:t>
-            </a:r>
-          </a:p>
-          <a:p>
-            <a:pPr>
-              <a:spcAft>
-                <a:spcPts val="1000"/>
-              </a:spcAft>
-            </a:pPr>
-            <a:r>
-              <a:rPr sz="1300" b="0" i="0">
-                <a:solidFill>
-                  <a:srgbClr val="333333"/>
-                </a:solidFill>
-                <a:latin typeface="Calibri"/>
-              </a:rPr>
-              <a:t>• OpenChain ISO/IEC 5230 — supply chain compliance standard</a:t>
-            </a:r>
-          </a:p>
-          <a:p>
-            <a:pPr>
-              <a:spcAft>
-                <a:spcPts val="400"/>
-              </a:spcAft>
-            </a:pPr>
-            <a:r>
-              <a:rPr sz="1600" b="1" i="0">
-                <a:solidFill>
-                  <a:srgbClr val="CC0066"/>
-                </a:solidFill>
-                <a:latin typeface="Calibri"/>
-              </a:rPr>
-              <a:t>Customer expectations</a:t>
-            </a:r>
-          </a:p>
-          <a:p>
-            <a:pPr>
-              <a:spcAft>
-                <a:spcPts val="400"/>
-              </a:spcAft>
-            </a:pPr>
-            <a:r>
-              <a:rPr sz="1300" b="0" i="0">
-                <a:solidFill>
-                  <a:srgbClr val="333333"/>
-                </a:solidFill>
-                <a:latin typeface="Calibri"/>
-              </a:rPr>
-              <a:t>• Enterprise buyers demand SBOM with shipment</a:t>
-            </a:r>
-          </a:p>
-          <a:p>
-            <a:pPr>
-              <a:spcAft>
-                <a:spcPts val="400"/>
-              </a:spcAft>
-            </a:pPr>
-            <a:r>
-              <a:rPr sz="1300" b="0" i="0">
-                <a:solidFill>
-                  <a:srgbClr val="333333"/>
-                </a:solidFill>
-                <a:latin typeface="Calibri"/>
-              </a:rPr>
-              <a:t>• Compliance teams ask for license manifests pre-purchase</a:t>
-            </a:r>
-          </a:p>
-          <a:p>
-            <a:pPr>
-              <a:spcAft>
-                <a:spcPts val="1000"/>
-              </a:spcAft>
-            </a:pPr>
-            <a:r>
-              <a:rPr sz="1300" b="0" i="0">
-                <a:solidFill>
-                  <a:srgbClr val="333333"/>
-                </a:solidFill>
-                <a:latin typeface="Calibri"/>
-              </a:rPr>
-              <a:t>• Penalty for non-compliance: lost deals, recalls, lawsuits</a:t>
-            </a:r>
-          </a:p>
-          <a:p>
-            <a:pPr>
-              <a:spcAft>
-                <a:spcPts val="400"/>
-              </a:spcAft>
-            </a:pPr>
-            <a:r>
-              <a:rPr sz="1600" b="1" i="0">
-                <a:solidFill>
-                  <a:srgbClr val="663399"/>
-                </a:solidFill>
-                <a:latin typeface="Calibri"/>
-              </a:rPr>
-              <a:t>The good news</a:t>
-            </a:r>
-          </a:p>
-          <a:p>
-            <a:pPr>
-              <a:spcAft>
-                <a:spcPts val="400"/>
-              </a:spcAft>
-            </a:pPr>
-            <a:r>
-              <a:rPr sz="1300" b="0" i="0">
-                <a:solidFill>
-                  <a:srgbClr val="333333"/>
-                </a:solidFill>
-                <a:latin typeface="Calibri"/>
-              </a:rPr>
-              <a:t>Yocto has all the tooling built in. You just need to enable it.</a:t>
+              <a:t># Will show CVEs against components — comparing to </a:t>
+            </a:r>
+            <a:r>
+              <a:rPr sz="1400" i="1" dirty="0" err="1">
+                <a:solidFill>
+                  <a:srgbClr val="808080"/>
+                </a:solidFill>
+                <a:latin typeface="Consolas"/>
+              </a:rPr>
+              <a:t>cve</a:t>
+            </a:r>
+            <a:r>
+              <a:rPr sz="1400" i="1" dirty="0">
+                <a:solidFill>
+                  <a:srgbClr val="808080"/>
+                </a:solidFill>
+                <a:latin typeface="Consolas"/>
+              </a:rPr>
+              <a:t>-check next</a:t>
             </a:r>
           </a:p>
         </p:txBody>
